--- a/docs/v2.0.0/cmps4191-imagelab-v2-presentation.pptx
+++ b/docs/v2.0.0/cmps4191-imagelab-v2-presentation.pptx
@@ -43993,7 +43993,7 @@
             <a:tbl>
               <a:tblPr bandRow="1">
                 <a:noFill/>
-                <a:tableStyleId>{5C0C52B7-A40C-49DB-B605-DC794E575C55}</a:tableStyleId>
+                <a:tableStyleId>{51AF67CF-0FFA-4AAD-A4D5-C67BB7332656}</a:tableStyleId>
               </a:tblPr>
               <a:tblGrid>
                 <a:gridCol w="1479650"/>
@@ -45028,4993 +45028,40 @@
           </a:ln>
         </p:spPr>
       </p:cxnSp>
-      <p:graphicFrame>
-        <p:nvGraphicFramePr>
+      <p:pic>
+        <p:nvPicPr>
           <p:cNvPr id="559" name="Google Shape;559;p59"/>
-          <p:cNvGraphicFramePr/>
+          <p:cNvPicPr preferRelativeResize="0"/>
           <p:nvPr/>
-        </p:nvGraphicFramePr>
-        <p:xfrm>
-          <a:off x="1082850" y="1426375"/>
-          <a:ext cx="3000000" cy="3000000"/>
-        </p:xfrm>
-        <a:graphic>
-          <a:graphicData uri="http://schemas.openxmlformats.org/drawingml/2006/table">
-            <a:tbl>
-              <a:tblPr>
-                <a:noFill/>
-                <a:tableStyleId>{B7759448-D5AB-4EED-B314-0BBE0966A651}</a:tableStyleId>
-              </a:tblPr>
-              <a:tblGrid>
-                <a:gridCol w="600075"/>
-                <a:gridCol w="790575"/>
-                <a:gridCol w="1152525"/>
-                <a:gridCol w="1190625"/>
-                <a:gridCol w="1104900"/>
-                <a:gridCol w="2152650"/>
-              </a:tblGrid>
-              <a:tr h="352425">
-                <a:tc>
-                  <a:txBody>
-                    <a:bodyPr/>
-                    <a:lstStyle/>
-                    <a:p>
-                      <a:pPr indent="0" lvl="0" marL="0" rtl="0" algn="l">
-                        <a:lnSpc>
-                          <a:spcPct val="115000"/>
-                        </a:lnSpc>
-                        <a:spcBef>
-                          <a:spcPts val="0"/>
-                        </a:spcBef>
-                        <a:spcAft>
-                          <a:spcPts val="0"/>
-                        </a:spcAft>
-                        <a:buNone/>
-                      </a:pPr>
-                      <a:r>
-                        <a:rPr lang="en" sz="1000"/>
-                        <a:t>Condition</a:t>
-                      </a:r>
-                      <a:endParaRPr sz="1000"/>
-                    </a:p>
-                  </a:txBody>
-                  <a:tcPr marT="19050" marB="19050" marR="28575" marL="28575" anchor="b">
-                    <a:lnL cap="flat" cmpd="sng" w="7625">
-                      <a:solidFill>
-                        <a:srgbClr val="000000"/>
-                      </a:solidFill>
-                      <a:prstDash val="solid"/>
-                      <a:round/>
-                      <a:headEnd len="sm" w="sm" type="none"/>
-                      <a:tailEnd len="sm" w="sm" type="none"/>
-                    </a:lnL>
-                    <a:lnR cap="flat" cmpd="sng" w="7625">
-                      <a:solidFill>
-                        <a:srgbClr val="000000"/>
-                      </a:solidFill>
-                      <a:prstDash val="solid"/>
-                      <a:round/>
-                      <a:headEnd len="sm" w="sm" type="none"/>
-                      <a:tailEnd len="sm" w="sm" type="none"/>
-                    </a:lnR>
-                    <a:lnT cap="flat" cmpd="sng" w="7625">
-                      <a:solidFill>
-                        <a:srgbClr val="000000"/>
-                      </a:solidFill>
-                      <a:prstDash val="solid"/>
-                      <a:round/>
-                      <a:headEnd len="sm" w="sm" type="none"/>
-                      <a:tailEnd len="sm" w="sm" type="none"/>
-                    </a:lnT>
-                    <a:lnB cap="flat" cmpd="sng" w="7625">
-                      <a:solidFill>
-                        <a:srgbClr val="000000"/>
-                      </a:solidFill>
-                      <a:prstDash val="solid"/>
-                      <a:round/>
-                      <a:headEnd len="sm" w="sm" type="none"/>
-                      <a:tailEnd len="sm" w="sm" type="none"/>
-                    </a:lnB>
-                    <a:solidFill>
-                      <a:srgbClr val="D9EAD3"/>
-                    </a:solidFill>
-                  </a:tcPr>
-                </a:tc>
-                <a:tc>
-                  <a:txBody>
-                    <a:bodyPr/>
-                    <a:lstStyle/>
-                    <a:p>
-                      <a:pPr indent="0" lvl="0" marL="0" rtl="0" algn="l">
-                        <a:lnSpc>
-                          <a:spcPct val="115000"/>
-                        </a:lnSpc>
-                        <a:spcBef>
-                          <a:spcPts val="0"/>
-                        </a:spcBef>
-                        <a:spcAft>
-                          <a:spcPts val="0"/>
-                        </a:spcAft>
-                        <a:buNone/>
-                      </a:pPr>
-                      <a:r>
-                        <a:rPr lang="en" sz="1000"/>
-                        <a:t>Mode</a:t>
-                      </a:r>
-                      <a:endParaRPr sz="1000"/>
-                    </a:p>
-                  </a:txBody>
-                  <a:tcPr marT="19050" marB="19050" marR="28575" marL="28575" anchor="b">
-                    <a:lnL cap="flat" cmpd="sng" w="7625">
-                      <a:solidFill>
-                        <a:srgbClr val="000000"/>
-                      </a:solidFill>
-                      <a:prstDash val="solid"/>
-                      <a:round/>
-                      <a:headEnd len="sm" w="sm" type="none"/>
-                      <a:tailEnd len="sm" w="sm" type="none"/>
-                    </a:lnL>
-                    <a:lnR cap="flat" cmpd="sng" w="7625">
-                      <a:solidFill>
-                        <a:srgbClr val="000000"/>
-                      </a:solidFill>
-                      <a:prstDash val="solid"/>
-                      <a:round/>
-                      <a:headEnd len="sm" w="sm" type="none"/>
-                      <a:tailEnd len="sm" w="sm" type="none"/>
-                    </a:lnR>
-                    <a:lnT cap="flat" cmpd="sng" w="7625">
-                      <a:solidFill>
-                        <a:srgbClr val="000000"/>
-                      </a:solidFill>
-                      <a:prstDash val="solid"/>
-                      <a:round/>
-                      <a:headEnd len="sm" w="sm" type="none"/>
-                      <a:tailEnd len="sm" w="sm" type="none"/>
-                    </a:lnT>
-                    <a:lnB cap="flat" cmpd="sng" w="7625">
-                      <a:solidFill>
-                        <a:srgbClr val="000000"/>
-                      </a:solidFill>
-                      <a:prstDash val="solid"/>
-                      <a:round/>
-                      <a:headEnd len="sm" w="sm" type="none"/>
-                      <a:tailEnd len="sm" w="sm" type="none"/>
-                    </a:lnB>
-                    <a:solidFill>
-                      <a:srgbClr val="D9EAD3"/>
-                    </a:solidFill>
-                  </a:tcPr>
-                </a:tc>
-                <a:tc>
-                  <a:txBody>
-                    <a:bodyPr/>
-                    <a:lstStyle/>
-                    <a:p>
-                      <a:pPr indent="0" lvl="0" marL="0" rtl="0" algn="l">
-                        <a:lnSpc>
-                          <a:spcPct val="115000"/>
-                        </a:lnSpc>
-                        <a:spcBef>
-                          <a:spcPts val="0"/>
-                        </a:spcBef>
-                        <a:spcAft>
-                          <a:spcPts val="0"/>
-                        </a:spcAft>
-                        <a:buNone/>
-                      </a:pPr>
-                      <a:r>
-                        <a:rPr lang="en" sz="1000"/>
-                        <a:t>Minimum Requests</a:t>
-                      </a:r>
-                      <a:endParaRPr sz="1000"/>
-                    </a:p>
-                  </a:txBody>
-                  <a:tcPr marT="19050" marB="19050" marR="28575" marL="28575" anchor="b">
-                    <a:lnL cap="flat" cmpd="sng" w="7625">
-                      <a:solidFill>
-                        <a:srgbClr val="000000"/>
-                      </a:solidFill>
-                      <a:prstDash val="solid"/>
-                      <a:round/>
-                      <a:headEnd len="sm" w="sm" type="none"/>
-                      <a:tailEnd len="sm" w="sm" type="none"/>
-                    </a:lnL>
-                    <a:lnR cap="flat" cmpd="sng" w="7625">
-                      <a:solidFill>
-                        <a:srgbClr val="000000"/>
-                      </a:solidFill>
-                      <a:prstDash val="solid"/>
-                      <a:round/>
-                      <a:headEnd len="sm" w="sm" type="none"/>
-                      <a:tailEnd len="sm" w="sm" type="none"/>
-                    </a:lnR>
-                    <a:lnT cap="flat" cmpd="sng" w="7625">
-                      <a:solidFill>
-                        <a:srgbClr val="000000"/>
-                      </a:solidFill>
-                      <a:prstDash val="solid"/>
-                      <a:round/>
-                      <a:headEnd len="sm" w="sm" type="none"/>
-                      <a:tailEnd len="sm" w="sm" type="none"/>
-                    </a:lnT>
-                    <a:lnB cap="flat" cmpd="sng" w="7625">
-                      <a:solidFill>
-                        <a:srgbClr val="000000"/>
-                      </a:solidFill>
-                      <a:prstDash val="solid"/>
-                      <a:round/>
-                      <a:headEnd len="sm" w="sm" type="none"/>
-                      <a:tailEnd len="sm" w="sm" type="none"/>
-                    </a:lnB>
-                    <a:solidFill>
-                      <a:srgbClr val="D9EAD3"/>
-                    </a:solidFill>
-                  </a:tcPr>
-                </a:tc>
-                <a:tc>
-                  <a:txBody>
-                    <a:bodyPr/>
-                    <a:lstStyle/>
-                    <a:p>
-                      <a:pPr indent="0" lvl="0" marL="0" rtl="0" algn="l">
-                        <a:lnSpc>
-                          <a:spcPct val="115000"/>
-                        </a:lnSpc>
-                        <a:spcBef>
-                          <a:spcPts val="0"/>
-                        </a:spcBef>
-                        <a:spcAft>
-                          <a:spcPts val="0"/>
-                        </a:spcAft>
-                        <a:buNone/>
-                      </a:pPr>
-                      <a:r>
-                        <a:rPr lang="en" sz="1000"/>
-                        <a:t>Maximum Requests</a:t>
-                      </a:r>
-                      <a:endParaRPr sz="1000"/>
-                    </a:p>
-                  </a:txBody>
-                  <a:tcPr marT="19050" marB="19050" marR="28575" marL="28575" anchor="b">
-                    <a:lnL cap="flat" cmpd="sng" w="7625">
-                      <a:solidFill>
-                        <a:srgbClr val="000000"/>
-                      </a:solidFill>
-                      <a:prstDash val="solid"/>
-                      <a:round/>
-                      <a:headEnd len="sm" w="sm" type="none"/>
-                      <a:tailEnd len="sm" w="sm" type="none"/>
-                    </a:lnL>
-                    <a:lnR cap="flat" cmpd="sng" w="7625">
-                      <a:solidFill>
-                        <a:srgbClr val="000000"/>
-                      </a:solidFill>
-                      <a:prstDash val="solid"/>
-                      <a:round/>
-                      <a:headEnd len="sm" w="sm" type="none"/>
-                      <a:tailEnd len="sm" w="sm" type="none"/>
-                    </a:lnR>
-                    <a:lnT cap="flat" cmpd="sng" w="7625">
-                      <a:solidFill>
-                        <a:srgbClr val="000000"/>
-                      </a:solidFill>
-                      <a:prstDash val="solid"/>
-                      <a:round/>
-                      <a:headEnd len="sm" w="sm" type="none"/>
-                      <a:tailEnd len="sm" w="sm" type="none"/>
-                    </a:lnT>
-                    <a:lnB cap="flat" cmpd="sng" w="7625">
-                      <a:solidFill>
-                        <a:srgbClr val="000000"/>
-                      </a:solidFill>
-                      <a:prstDash val="solid"/>
-                      <a:round/>
-                      <a:headEnd len="sm" w="sm" type="none"/>
-                      <a:tailEnd len="sm" w="sm" type="none"/>
-                    </a:lnB>
-                    <a:solidFill>
-                      <a:srgbClr val="D9EAD3"/>
-                    </a:solidFill>
-                  </a:tcPr>
-                </a:tc>
-                <a:tc>
-                  <a:txBody>
-                    <a:bodyPr/>
-                    <a:lstStyle/>
-                    <a:p>
-                      <a:pPr indent="0" lvl="0" marL="0" rtl="0" algn="l">
-                        <a:lnSpc>
-                          <a:spcPct val="115000"/>
-                        </a:lnSpc>
-                        <a:spcBef>
-                          <a:spcPts val="0"/>
-                        </a:spcBef>
-                        <a:spcAft>
-                          <a:spcPts val="0"/>
-                        </a:spcAft>
-                        <a:buNone/>
-                      </a:pPr>
-                      <a:r>
-                        <a:rPr lang="en" sz="1000"/>
-                        <a:t>Average Requests</a:t>
-                      </a:r>
-                      <a:endParaRPr sz="1000"/>
-                    </a:p>
-                  </a:txBody>
-                  <a:tcPr marT="19050" marB="19050" marR="28575" marL="28575" anchor="b">
-                    <a:lnL cap="flat" cmpd="sng" w="7625">
-                      <a:solidFill>
-                        <a:srgbClr val="000000"/>
-                      </a:solidFill>
-                      <a:prstDash val="solid"/>
-                      <a:round/>
-                      <a:headEnd len="sm" w="sm" type="none"/>
-                      <a:tailEnd len="sm" w="sm" type="none"/>
-                    </a:lnL>
-                    <a:lnR cap="flat" cmpd="sng" w="7625">
-                      <a:solidFill>
-                        <a:srgbClr val="000000"/>
-                      </a:solidFill>
-                      <a:prstDash val="solid"/>
-                      <a:round/>
-                      <a:headEnd len="sm" w="sm" type="none"/>
-                      <a:tailEnd len="sm" w="sm" type="none"/>
-                    </a:lnR>
-                    <a:lnT cap="flat" cmpd="sng" w="7625">
-                      <a:solidFill>
-                        <a:srgbClr val="000000"/>
-                      </a:solidFill>
-                      <a:prstDash val="solid"/>
-                      <a:round/>
-                      <a:headEnd len="sm" w="sm" type="none"/>
-                      <a:tailEnd len="sm" w="sm" type="none"/>
-                    </a:lnT>
-                    <a:lnB cap="flat" cmpd="sng" w="7625">
-                      <a:solidFill>
-                        <a:srgbClr val="000000"/>
-                      </a:solidFill>
-                      <a:prstDash val="solid"/>
-                      <a:round/>
-                      <a:headEnd len="sm" w="sm" type="none"/>
-                      <a:tailEnd len="sm" w="sm" type="none"/>
-                    </a:lnB>
-                    <a:solidFill>
-                      <a:srgbClr val="D9EAD3"/>
-                    </a:solidFill>
-                  </a:tcPr>
-                </a:tc>
-                <a:tc>
-                  <a:txBody>
-                    <a:bodyPr/>
-                    <a:lstStyle/>
-                    <a:p>
-                      <a:pPr indent="0" lvl="0" marL="0" rtl="0" algn="l">
-                        <a:lnSpc>
-                          <a:spcPct val="115000"/>
-                        </a:lnSpc>
-                        <a:spcBef>
-                          <a:spcPts val="0"/>
-                        </a:spcBef>
-                        <a:spcAft>
-                          <a:spcPts val="0"/>
-                        </a:spcAft>
-                        <a:buNone/>
-                      </a:pPr>
-                      <a:r>
-                        <a:rPr lang="en" sz="1000"/>
-                        <a:t>Average Completion-Detection Delay</a:t>
-                      </a:r>
-                      <a:endParaRPr sz="1000"/>
-                    </a:p>
-                  </a:txBody>
-                  <a:tcPr marT="19050" marB="19050" marR="28575" marL="28575" anchor="b">
-                    <a:lnL cap="flat" cmpd="sng" w="7625">
-                      <a:solidFill>
-                        <a:srgbClr val="000000"/>
-                      </a:solidFill>
-                      <a:prstDash val="solid"/>
-                      <a:round/>
-                      <a:headEnd len="sm" w="sm" type="none"/>
-                      <a:tailEnd len="sm" w="sm" type="none"/>
-                    </a:lnL>
-                    <a:lnR cap="flat" cmpd="sng" w="7625">
-                      <a:solidFill>
-                        <a:srgbClr val="000000"/>
-                      </a:solidFill>
-                      <a:prstDash val="solid"/>
-                      <a:round/>
-                      <a:headEnd len="sm" w="sm" type="none"/>
-                      <a:tailEnd len="sm" w="sm" type="none"/>
-                    </a:lnR>
-                    <a:lnT cap="flat" cmpd="sng" w="7625">
-                      <a:solidFill>
-                        <a:srgbClr val="000000"/>
-                      </a:solidFill>
-                      <a:prstDash val="solid"/>
-                      <a:round/>
-                      <a:headEnd len="sm" w="sm" type="none"/>
-                      <a:tailEnd len="sm" w="sm" type="none"/>
-                    </a:lnT>
-                    <a:lnB cap="flat" cmpd="sng" w="7625">
-                      <a:solidFill>
-                        <a:srgbClr val="000000"/>
-                      </a:solidFill>
-                      <a:prstDash val="solid"/>
-                      <a:round/>
-                      <a:headEnd len="sm" w="sm" type="none"/>
-                      <a:tailEnd len="sm" w="sm" type="none"/>
-                    </a:lnB>
-                    <a:solidFill>
-                      <a:srgbClr val="D9EAD3"/>
-                    </a:solidFill>
-                  </a:tcPr>
-                </a:tc>
-              </a:tr>
-              <a:tr h="200025">
-                <a:tc>
-                  <a:txBody>
-                    <a:bodyPr/>
-                    <a:lstStyle/>
-                    <a:p>
-                      <a:pPr indent="0" lvl="0" marL="0" rtl="0" algn="l">
-                        <a:lnSpc>
-                          <a:spcPct val="115000"/>
-                        </a:lnSpc>
-                        <a:spcBef>
-                          <a:spcPts val="0"/>
-                        </a:spcBef>
-                        <a:spcAft>
-                          <a:spcPts val="0"/>
-                        </a:spcAft>
-                        <a:buNone/>
-                      </a:pPr>
-                      <a:r>
-                        <a:rPr lang="en" sz="1000"/>
-                        <a:t>A</a:t>
-                      </a:r>
-                      <a:endParaRPr sz="1000"/>
-                    </a:p>
-                  </a:txBody>
-                  <a:tcPr marT="19050" marB="19050" marR="28575" marL="28575" anchor="b">
-                    <a:lnL cap="flat" cmpd="sng" w="7625">
-                      <a:solidFill>
-                        <a:srgbClr val="000000"/>
-                      </a:solidFill>
-                      <a:prstDash val="solid"/>
-                      <a:round/>
-                      <a:headEnd len="sm" w="sm" type="none"/>
-                      <a:tailEnd len="sm" w="sm" type="none"/>
-                    </a:lnL>
-                    <a:lnR cap="flat" cmpd="sng" w="7625">
-                      <a:solidFill>
-                        <a:srgbClr val="000000"/>
-                      </a:solidFill>
-                      <a:prstDash val="solid"/>
-                      <a:round/>
-                      <a:headEnd len="sm" w="sm" type="none"/>
-                      <a:tailEnd len="sm" w="sm" type="none"/>
-                    </a:lnR>
-                    <a:lnT cap="flat" cmpd="sng" w="7625">
-                      <a:solidFill>
-                        <a:srgbClr val="000000"/>
-                      </a:solidFill>
-                      <a:prstDash val="solid"/>
-                      <a:round/>
-                      <a:headEnd len="sm" w="sm" type="none"/>
-                      <a:tailEnd len="sm" w="sm" type="none"/>
-                    </a:lnT>
-                    <a:lnB cap="flat" cmpd="sng" w="7625">
-                      <a:solidFill>
-                        <a:srgbClr val="000000"/>
-                      </a:solidFill>
-                      <a:prstDash val="solid"/>
-                      <a:round/>
-                      <a:headEnd len="sm" w="sm" type="none"/>
-                      <a:tailEnd len="sm" w="sm" type="none"/>
-                    </a:lnB>
-                  </a:tcPr>
-                </a:tc>
-                <a:tc>
-                  <a:txBody>
-                    <a:bodyPr/>
-                    <a:lstStyle/>
-                    <a:p>
-                      <a:pPr indent="0" lvl="0" marL="0" rtl="0" algn="l">
-                        <a:lnSpc>
-                          <a:spcPct val="115000"/>
-                        </a:lnSpc>
-                        <a:spcBef>
-                          <a:spcPts val="0"/>
-                        </a:spcBef>
-                        <a:spcAft>
-                          <a:spcPts val="0"/>
-                        </a:spcAft>
-                        <a:buNone/>
-                      </a:pPr>
-                      <a:r>
-                        <a:rPr lang="en" sz="1000"/>
-                        <a:t>Short Polling</a:t>
-                      </a:r>
-                      <a:endParaRPr sz="1000"/>
-                    </a:p>
-                  </a:txBody>
-                  <a:tcPr marT="19050" marB="19050" marR="28575" marL="28575" anchor="b">
-                    <a:lnL cap="flat" cmpd="sng" w="7625">
-                      <a:solidFill>
-                        <a:srgbClr val="000000"/>
-                      </a:solidFill>
-                      <a:prstDash val="solid"/>
-                      <a:round/>
-                      <a:headEnd len="sm" w="sm" type="none"/>
-                      <a:tailEnd len="sm" w="sm" type="none"/>
-                    </a:lnL>
-                    <a:lnR cap="flat" cmpd="sng" w="7625">
-                      <a:solidFill>
-                        <a:srgbClr val="000000"/>
-                      </a:solidFill>
-                      <a:prstDash val="solid"/>
-                      <a:round/>
-                      <a:headEnd len="sm" w="sm" type="none"/>
-                      <a:tailEnd len="sm" w="sm" type="none"/>
-                    </a:lnR>
-                    <a:lnT cap="flat" cmpd="sng" w="7625">
-                      <a:solidFill>
-                        <a:srgbClr val="000000"/>
-                      </a:solidFill>
-                      <a:prstDash val="solid"/>
-                      <a:round/>
-                      <a:headEnd len="sm" w="sm" type="none"/>
-                      <a:tailEnd len="sm" w="sm" type="none"/>
-                    </a:lnT>
-                    <a:lnB cap="flat" cmpd="sng" w="7625">
-                      <a:solidFill>
-                        <a:srgbClr val="000000"/>
-                      </a:solidFill>
-                      <a:prstDash val="solid"/>
-                      <a:round/>
-                      <a:headEnd len="sm" w="sm" type="none"/>
-                      <a:tailEnd len="sm" w="sm" type="none"/>
-                    </a:lnB>
-                  </a:tcPr>
-                </a:tc>
-                <a:tc>
-                  <a:txBody>
-                    <a:bodyPr/>
-                    <a:lstStyle/>
-                    <a:p>
-                      <a:pPr indent="0" lvl="0" marL="0" rtl="0" algn="r">
-                        <a:lnSpc>
-                          <a:spcPct val="115000"/>
-                        </a:lnSpc>
-                        <a:spcBef>
-                          <a:spcPts val="0"/>
-                        </a:spcBef>
-                        <a:spcAft>
-                          <a:spcPts val="0"/>
-                        </a:spcAft>
-                        <a:buNone/>
-                      </a:pPr>
-                      <a:r>
-                        <a:rPr lang="en" sz="1000"/>
-                        <a:t>32.0</a:t>
-                      </a:r>
-                      <a:endParaRPr sz="1000"/>
-                    </a:p>
-                  </a:txBody>
-                  <a:tcPr marT="19050" marB="19050" marR="28575" marL="28575" anchor="b">
-                    <a:lnL cap="flat" cmpd="sng" w="7625">
-                      <a:solidFill>
-                        <a:srgbClr val="000000"/>
-                      </a:solidFill>
-                      <a:prstDash val="solid"/>
-                      <a:round/>
-                      <a:headEnd len="sm" w="sm" type="none"/>
-                      <a:tailEnd len="sm" w="sm" type="none"/>
-                    </a:lnL>
-                    <a:lnR cap="flat" cmpd="sng" w="7625">
-                      <a:solidFill>
-                        <a:srgbClr val="000000"/>
-                      </a:solidFill>
-                      <a:prstDash val="solid"/>
-                      <a:round/>
-                      <a:headEnd len="sm" w="sm" type="none"/>
-                      <a:tailEnd len="sm" w="sm" type="none"/>
-                    </a:lnR>
-                    <a:lnT cap="flat" cmpd="sng" w="7625">
-                      <a:solidFill>
-                        <a:srgbClr val="000000"/>
-                      </a:solidFill>
-                      <a:prstDash val="solid"/>
-                      <a:round/>
-                      <a:headEnd len="sm" w="sm" type="none"/>
-                      <a:tailEnd len="sm" w="sm" type="none"/>
-                    </a:lnT>
-                    <a:lnB cap="flat" cmpd="sng" w="7625">
-                      <a:solidFill>
-                        <a:srgbClr val="000000"/>
-                      </a:solidFill>
-                      <a:prstDash val="solid"/>
-                      <a:round/>
-                      <a:headEnd len="sm" w="sm" type="none"/>
-                      <a:tailEnd len="sm" w="sm" type="none"/>
-                    </a:lnB>
-                  </a:tcPr>
-                </a:tc>
-                <a:tc>
-                  <a:txBody>
-                    <a:bodyPr/>
-                    <a:lstStyle/>
-                    <a:p>
-                      <a:pPr indent="0" lvl="0" marL="0" rtl="0" algn="r">
-                        <a:lnSpc>
-                          <a:spcPct val="115000"/>
-                        </a:lnSpc>
-                        <a:spcBef>
-                          <a:spcPts val="0"/>
-                        </a:spcBef>
-                        <a:spcAft>
-                          <a:spcPts val="0"/>
-                        </a:spcAft>
-                        <a:buNone/>
-                      </a:pPr>
-                      <a:r>
-                        <a:rPr lang="en" sz="1000"/>
-                        <a:t>32.0</a:t>
-                      </a:r>
-                      <a:endParaRPr sz="1000"/>
-                    </a:p>
-                  </a:txBody>
-                  <a:tcPr marT="19050" marB="19050" marR="28575" marL="28575" anchor="b">
-                    <a:lnL cap="flat" cmpd="sng" w="7625">
-                      <a:solidFill>
-                        <a:srgbClr val="000000"/>
-                      </a:solidFill>
-                      <a:prstDash val="solid"/>
-                      <a:round/>
-                      <a:headEnd len="sm" w="sm" type="none"/>
-                      <a:tailEnd len="sm" w="sm" type="none"/>
-                    </a:lnL>
-                    <a:lnR cap="flat" cmpd="sng" w="7625">
-                      <a:solidFill>
-                        <a:srgbClr val="000000"/>
-                      </a:solidFill>
-                      <a:prstDash val="solid"/>
-                      <a:round/>
-                      <a:headEnd len="sm" w="sm" type="none"/>
-                      <a:tailEnd len="sm" w="sm" type="none"/>
-                    </a:lnR>
-                    <a:lnT cap="flat" cmpd="sng" w="7625">
-                      <a:solidFill>
-                        <a:srgbClr val="000000"/>
-                      </a:solidFill>
-                      <a:prstDash val="solid"/>
-                      <a:round/>
-                      <a:headEnd len="sm" w="sm" type="none"/>
-                      <a:tailEnd len="sm" w="sm" type="none"/>
-                    </a:lnT>
-                    <a:lnB cap="flat" cmpd="sng" w="7625">
-                      <a:solidFill>
-                        <a:srgbClr val="000000"/>
-                      </a:solidFill>
-                      <a:prstDash val="solid"/>
-                      <a:round/>
-                      <a:headEnd len="sm" w="sm" type="none"/>
-                      <a:tailEnd len="sm" w="sm" type="none"/>
-                    </a:lnB>
-                  </a:tcPr>
-                </a:tc>
-                <a:tc>
-                  <a:txBody>
-                    <a:bodyPr/>
-                    <a:lstStyle/>
-                    <a:p>
-                      <a:pPr indent="0" lvl="0" marL="0" rtl="0" algn="r">
-                        <a:lnSpc>
-                          <a:spcPct val="115000"/>
-                        </a:lnSpc>
-                        <a:spcBef>
-                          <a:spcPts val="0"/>
-                        </a:spcBef>
-                        <a:spcAft>
-                          <a:spcPts val="0"/>
-                        </a:spcAft>
-                        <a:buNone/>
-                      </a:pPr>
-                      <a:r>
-                        <a:rPr lang="en" sz="1000"/>
-                        <a:t>32.0</a:t>
-                      </a:r>
-                      <a:endParaRPr sz="1000"/>
-                    </a:p>
-                  </a:txBody>
-                  <a:tcPr marT="19050" marB="19050" marR="28575" marL="28575" anchor="b">
-                    <a:lnL cap="flat" cmpd="sng" w="7625">
-                      <a:solidFill>
-                        <a:srgbClr val="000000"/>
-                      </a:solidFill>
-                      <a:prstDash val="solid"/>
-                      <a:round/>
-                      <a:headEnd len="sm" w="sm" type="none"/>
-                      <a:tailEnd len="sm" w="sm" type="none"/>
-                    </a:lnL>
-                    <a:lnR cap="flat" cmpd="sng" w="7625">
-                      <a:solidFill>
-                        <a:srgbClr val="000000"/>
-                      </a:solidFill>
-                      <a:prstDash val="solid"/>
-                      <a:round/>
-                      <a:headEnd len="sm" w="sm" type="none"/>
-                      <a:tailEnd len="sm" w="sm" type="none"/>
-                    </a:lnR>
-                    <a:lnT cap="flat" cmpd="sng" w="7625">
-                      <a:solidFill>
-                        <a:srgbClr val="000000"/>
-                      </a:solidFill>
-                      <a:prstDash val="solid"/>
-                      <a:round/>
-                      <a:headEnd len="sm" w="sm" type="none"/>
-                      <a:tailEnd len="sm" w="sm" type="none"/>
-                    </a:lnT>
-                    <a:lnB cap="flat" cmpd="sng" w="7625">
-                      <a:solidFill>
-                        <a:srgbClr val="000000"/>
-                      </a:solidFill>
-                      <a:prstDash val="solid"/>
-                      <a:round/>
-                      <a:headEnd len="sm" w="sm" type="none"/>
-                      <a:tailEnd len="sm" w="sm" type="none"/>
-                    </a:lnB>
-                  </a:tcPr>
-                </a:tc>
-                <a:tc>
-                  <a:txBody>
-                    <a:bodyPr/>
-                    <a:lstStyle/>
-                    <a:p>
-                      <a:pPr indent="0" lvl="0" marL="0" rtl="0" algn="r">
-                        <a:lnSpc>
-                          <a:spcPct val="115000"/>
-                        </a:lnSpc>
-                        <a:spcBef>
-                          <a:spcPts val="0"/>
-                        </a:spcBef>
-                        <a:spcAft>
-                          <a:spcPts val="0"/>
-                        </a:spcAft>
-                        <a:buNone/>
-                      </a:pPr>
-                      <a:r>
-                        <a:rPr lang="en" sz="1000"/>
-                        <a:t>317.3</a:t>
-                      </a:r>
-                      <a:endParaRPr sz="1000"/>
-                    </a:p>
-                  </a:txBody>
-                  <a:tcPr marT="19050" marB="19050" marR="28575" marL="28575" anchor="b">
-                    <a:lnL cap="flat" cmpd="sng" w="7625">
-                      <a:solidFill>
-                        <a:srgbClr val="000000"/>
-                      </a:solidFill>
-                      <a:prstDash val="solid"/>
-                      <a:round/>
-                      <a:headEnd len="sm" w="sm" type="none"/>
-                      <a:tailEnd len="sm" w="sm" type="none"/>
-                    </a:lnL>
-                    <a:lnR cap="flat" cmpd="sng" w="7625">
-                      <a:solidFill>
-                        <a:srgbClr val="000000"/>
-                      </a:solidFill>
-                      <a:prstDash val="solid"/>
-                      <a:round/>
-                      <a:headEnd len="sm" w="sm" type="none"/>
-                      <a:tailEnd len="sm" w="sm" type="none"/>
-                    </a:lnR>
-                    <a:lnT cap="flat" cmpd="sng" w="7625">
-                      <a:solidFill>
-                        <a:srgbClr val="000000"/>
-                      </a:solidFill>
-                      <a:prstDash val="solid"/>
-                      <a:round/>
-                      <a:headEnd len="sm" w="sm" type="none"/>
-                      <a:tailEnd len="sm" w="sm" type="none"/>
-                    </a:lnT>
-                    <a:lnB cap="flat" cmpd="sng" w="7625">
-                      <a:solidFill>
-                        <a:srgbClr val="000000"/>
-                      </a:solidFill>
-                      <a:prstDash val="solid"/>
-                      <a:round/>
-                      <a:headEnd len="sm" w="sm" type="none"/>
-                      <a:tailEnd len="sm" w="sm" type="none"/>
-                    </a:lnB>
-                  </a:tcPr>
-                </a:tc>
-              </a:tr>
-              <a:tr h="200025">
-                <a:tc>
-                  <a:txBody>
-                    <a:bodyPr/>
-                    <a:lstStyle/>
-                    <a:p>
-                      <a:pPr indent="0" lvl="0" marL="0" rtl="0" algn="l">
-                        <a:lnSpc>
-                          <a:spcPct val="115000"/>
-                        </a:lnSpc>
-                        <a:spcBef>
-                          <a:spcPts val="0"/>
-                        </a:spcBef>
-                        <a:spcAft>
-                          <a:spcPts val="0"/>
-                        </a:spcAft>
-                        <a:buNone/>
-                      </a:pPr>
-                      <a:r>
-                        <a:rPr lang="en" sz="1000"/>
-                        <a:t>A</a:t>
-                      </a:r>
-                      <a:endParaRPr sz="1000"/>
-                    </a:p>
-                  </a:txBody>
-                  <a:tcPr marT="19050" marB="19050" marR="28575" marL="28575" anchor="b">
-                    <a:lnL cap="flat" cmpd="sng" w="7625">
-                      <a:solidFill>
-                        <a:srgbClr val="000000"/>
-                      </a:solidFill>
-                      <a:prstDash val="solid"/>
-                      <a:round/>
-                      <a:headEnd len="sm" w="sm" type="none"/>
-                      <a:tailEnd len="sm" w="sm" type="none"/>
-                    </a:lnL>
-                    <a:lnR cap="flat" cmpd="sng" w="7625">
-                      <a:solidFill>
-                        <a:srgbClr val="000000"/>
-                      </a:solidFill>
-                      <a:prstDash val="solid"/>
-                      <a:round/>
-                      <a:headEnd len="sm" w="sm" type="none"/>
-                      <a:tailEnd len="sm" w="sm" type="none"/>
-                    </a:lnR>
-                    <a:lnT cap="flat" cmpd="sng" w="7625">
-                      <a:solidFill>
-                        <a:srgbClr val="000000"/>
-                      </a:solidFill>
-                      <a:prstDash val="solid"/>
-                      <a:round/>
-                      <a:headEnd len="sm" w="sm" type="none"/>
-                      <a:tailEnd len="sm" w="sm" type="none"/>
-                    </a:lnT>
-                    <a:lnB cap="flat" cmpd="sng" w="7625">
-                      <a:solidFill>
-                        <a:srgbClr val="000000"/>
-                      </a:solidFill>
-                      <a:prstDash val="solid"/>
-                      <a:round/>
-                      <a:headEnd len="sm" w="sm" type="none"/>
-                      <a:tailEnd len="sm" w="sm" type="none"/>
-                    </a:lnB>
-                  </a:tcPr>
-                </a:tc>
-                <a:tc>
-                  <a:txBody>
-                    <a:bodyPr/>
-                    <a:lstStyle/>
-                    <a:p>
-                      <a:pPr indent="0" lvl="0" marL="0" rtl="0" algn="l">
-                        <a:lnSpc>
-                          <a:spcPct val="115000"/>
-                        </a:lnSpc>
-                        <a:spcBef>
-                          <a:spcPts val="0"/>
-                        </a:spcBef>
-                        <a:spcAft>
-                          <a:spcPts val="0"/>
-                        </a:spcAft>
-                        <a:buNone/>
-                      </a:pPr>
-                      <a:r>
-                        <a:rPr lang="en" sz="1000"/>
-                        <a:t>Long Polling</a:t>
-                      </a:r>
-                      <a:endParaRPr sz="1000"/>
-                    </a:p>
-                  </a:txBody>
-                  <a:tcPr marT="19050" marB="19050" marR="28575" marL="28575" anchor="b">
-                    <a:lnL cap="flat" cmpd="sng" w="7625">
-                      <a:solidFill>
-                        <a:srgbClr val="000000"/>
-                      </a:solidFill>
-                      <a:prstDash val="solid"/>
-                      <a:round/>
-                      <a:headEnd len="sm" w="sm" type="none"/>
-                      <a:tailEnd len="sm" w="sm" type="none"/>
-                    </a:lnL>
-                    <a:lnR cap="flat" cmpd="sng" w="7625">
-                      <a:solidFill>
-                        <a:srgbClr val="000000"/>
-                      </a:solidFill>
-                      <a:prstDash val="solid"/>
-                      <a:round/>
-                      <a:headEnd len="sm" w="sm" type="none"/>
-                      <a:tailEnd len="sm" w="sm" type="none"/>
-                    </a:lnR>
-                    <a:lnT cap="flat" cmpd="sng" w="7625">
-                      <a:solidFill>
-                        <a:srgbClr val="000000"/>
-                      </a:solidFill>
-                      <a:prstDash val="solid"/>
-                      <a:round/>
-                      <a:headEnd len="sm" w="sm" type="none"/>
-                      <a:tailEnd len="sm" w="sm" type="none"/>
-                    </a:lnT>
-                    <a:lnB cap="flat" cmpd="sng" w="7625">
-                      <a:solidFill>
-                        <a:srgbClr val="000000"/>
-                      </a:solidFill>
-                      <a:prstDash val="solid"/>
-                      <a:round/>
-                      <a:headEnd len="sm" w="sm" type="none"/>
-                      <a:tailEnd len="sm" w="sm" type="none"/>
-                    </a:lnB>
-                  </a:tcPr>
-                </a:tc>
-                <a:tc>
-                  <a:txBody>
-                    <a:bodyPr/>
-                    <a:lstStyle/>
-                    <a:p>
-                      <a:pPr indent="0" lvl="0" marL="0" rtl="0" algn="r">
-                        <a:lnSpc>
-                          <a:spcPct val="115000"/>
-                        </a:lnSpc>
-                        <a:spcBef>
-                          <a:spcPts val="0"/>
-                        </a:spcBef>
-                        <a:spcAft>
-                          <a:spcPts val="0"/>
-                        </a:spcAft>
-                        <a:buNone/>
-                      </a:pPr>
-                      <a:r>
-                        <a:rPr lang="en" sz="1000"/>
-                        <a:t>6.0</a:t>
-                      </a:r>
-                      <a:endParaRPr sz="1000"/>
-                    </a:p>
-                  </a:txBody>
-                  <a:tcPr marT="19050" marB="19050" marR="28575" marL="28575" anchor="b">
-                    <a:lnL cap="flat" cmpd="sng" w="7625">
-                      <a:solidFill>
-                        <a:srgbClr val="000000"/>
-                      </a:solidFill>
-                      <a:prstDash val="solid"/>
-                      <a:round/>
-                      <a:headEnd len="sm" w="sm" type="none"/>
-                      <a:tailEnd len="sm" w="sm" type="none"/>
-                    </a:lnL>
-                    <a:lnR cap="flat" cmpd="sng" w="7625">
-                      <a:solidFill>
-                        <a:srgbClr val="000000"/>
-                      </a:solidFill>
-                      <a:prstDash val="solid"/>
-                      <a:round/>
-                      <a:headEnd len="sm" w="sm" type="none"/>
-                      <a:tailEnd len="sm" w="sm" type="none"/>
-                    </a:lnR>
-                    <a:lnT cap="flat" cmpd="sng" w="7625">
-                      <a:solidFill>
-                        <a:srgbClr val="000000"/>
-                      </a:solidFill>
-                      <a:prstDash val="solid"/>
-                      <a:round/>
-                      <a:headEnd len="sm" w="sm" type="none"/>
-                      <a:tailEnd len="sm" w="sm" type="none"/>
-                    </a:lnT>
-                    <a:lnB cap="flat" cmpd="sng" w="7625">
-                      <a:solidFill>
-                        <a:srgbClr val="000000"/>
-                      </a:solidFill>
-                      <a:prstDash val="solid"/>
-                      <a:round/>
-                      <a:headEnd len="sm" w="sm" type="none"/>
-                      <a:tailEnd len="sm" w="sm" type="none"/>
-                    </a:lnB>
-                  </a:tcPr>
-                </a:tc>
-                <a:tc>
-                  <a:txBody>
-                    <a:bodyPr/>
-                    <a:lstStyle/>
-                    <a:p>
-                      <a:pPr indent="0" lvl="0" marL="0" rtl="0" algn="r">
-                        <a:lnSpc>
-                          <a:spcPct val="115000"/>
-                        </a:lnSpc>
-                        <a:spcBef>
-                          <a:spcPts val="0"/>
-                        </a:spcBef>
-                        <a:spcAft>
-                          <a:spcPts val="0"/>
-                        </a:spcAft>
-                        <a:buNone/>
-                      </a:pPr>
-                      <a:r>
-                        <a:rPr lang="en" sz="1000"/>
-                        <a:t>6.0</a:t>
-                      </a:r>
-                      <a:endParaRPr sz="1000"/>
-                    </a:p>
-                  </a:txBody>
-                  <a:tcPr marT="19050" marB="19050" marR="28575" marL="28575" anchor="b">
-                    <a:lnL cap="flat" cmpd="sng" w="7625">
-                      <a:solidFill>
-                        <a:srgbClr val="000000"/>
-                      </a:solidFill>
-                      <a:prstDash val="solid"/>
-                      <a:round/>
-                      <a:headEnd len="sm" w="sm" type="none"/>
-                      <a:tailEnd len="sm" w="sm" type="none"/>
-                    </a:lnL>
-                    <a:lnR cap="flat" cmpd="sng" w="7625">
-                      <a:solidFill>
-                        <a:srgbClr val="000000"/>
-                      </a:solidFill>
-                      <a:prstDash val="solid"/>
-                      <a:round/>
-                      <a:headEnd len="sm" w="sm" type="none"/>
-                      <a:tailEnd len="sm" w="sm" type="none"/>
-                    </a:lnR>
-                    <a:lnT cap="flat" cmpd="sng" w="7625">
-                      <a:solidFill>
-                        <a:srgbClr val="000000"/>
-                      </a:solidFill>
-                      <a:prstDash val="solid"/>
-                      <a:round/>
-                      <a:headEnd len="sm" w="sm" type="none"/>
-                      <a:tailEnd len="sm" w="sm" type="none"/>
-                    </a:lnT>
-                    <a:lnB cap="flat" cmpd="sng" w="7625">
-                      <a:solidFill>
-                        <a:srgbClr val="000000"/>
-                      </a:solidFill>
-                      <a:prstDash val="solid"/>
-                      <a:round/>
-                      <a:headEnd len="sm" w="sm" type="none"/>
-                      <a:tailEnd len="sm" w="sm" type="none"/>
-                    </a:lnB>
-                  </a:tcPr>
-                </a:tc>
-                <a:tc>
-                  <a:txBody>
-                    <a:bodyPr/>
-                    <a:lstStyle/>
-                    <a:p>
-                      <a:pPr indent="0" lvl="0" marL="0" rtl="0" algn="r">
-                        <a:lnSpc>
-                          <a:spcPct val="115000"/>
-                        </a:lnSpc>
-                        <a:spcBef>
-                          <a:spcPts val="0"/>
-                        </a:spcBef>
-                        <a:spcAft>
-                          <a:spcPts val="0"/>
-                        </a:spcAft>
-                        <a:buNone/>
-                      </a:pPr>
-                      <a:r>
-                        <a:rPr lang="en" sz="1000"/>
-                        <a:t>6.0</a:t>
-                      </a:r>
-                      <a:endParaRPr sz="1000"/>
-                    </a:p>
-                  </a:txBody>
-                  <a:tcPr marT="19050" marB="19050" marR="28575" marL="28575" anchor="b">
-                    <a:lnL cap="flat" cmpd="sng" w="7625">
-                      <a:solidFill>
-                        <a:srgbClr val="000000"/>
-                      </a:solidFill>
-                      <a:prstDash val="solid"/>
-                      <a:round/>
-                      <a:headEnd len="sm" w="sm" type="none"/>
-                      <a:tailEnd len="sm" w="sm" type="none"/>
-                    </a:lnL>
-                    <a:lnR cap="flat" cmpd="sng" w="7625">
-                      <a:solidFill>
-                        <a:srgbClr val="000000"/>
-                      </a:solidFill>
-                      <a:prstDash val="solid"/>
-                      <a:round/>
-                      <a:headEnd len="sm" w="sm" type="none"/>
-                      <a:tailEnd len="sm" w="sm" type="none"/>
-                    </a:lnR>
-                    <a:lnT cap="flat" cmpd="sng" w="7625">
-                      <a:solidFill>
-                        <a:srgbClr val="000000"/>
-                      </a:solidFill>
-                      <a:prstDash val="solid"/>
-                      <a:round/>
-                      <a:headEnd len="sm" w="sm" type="none"/>
-                      <a:tailEnd len="sm" w="sm" type="none"/>
-                    </a:lnT>
-                    <a:lnB cap="flat" cmpd="sng" w="7625">
-                      <a:solidFill>
-                        <a:srgbClr val="000000"/>
-                      </a:solidFill>
-                      <a:prstDash val="solid"/>
-                      <a:round/>
-                      <a:headEnd len="sm" w="sm" type="none"/>
-                      <a:tailEnd len="sm" w="sm" type="none"/>
-                    </a:lnB>
-                  </a:tcPr>
-                </a:tc>
-                <a:tc>
-                  <a:txBody>
-                    <a:bodyPr/>
-                    <a:lstStyle/>
-                    <a:p>
-                      <a:pPr indent="0" lvl="0" marL="0" rtl="0" algn="r">
-                        <a:lnSpc>
-                          <a:spcPct val="115000"/>
-                        </a:lnSpc>
-                        <a:spcBef>
-                          <a:spcPts val="0"/>
-                        </a:spcBef>
-                        <a:spcAft>
-                          <a:spcPts val="0"/>
-                        </a:spcAft>
-                        <a:buNone/>
-                      </a:pPr>
-                      <a:r>
-                        <a:rPr lang="en" sz="1000"/>
-                        <a:t>95.7</a:t>
-                      </a:r>
-                      <a:endParaRPr sz="1000"/>
-                    </a:p>
-                  </a:txBody>
-                  <a:tcPr marT="19050" marB="19050" marR="28575" marL="28575" anchor="b">
-                    <a:lnL cap="flat" cmpd="sng" w="7625">
-                      <a:solidFill>
-                        <a:srgbClr val="000000"/>
-                      </a:solidFill>
-                      <a:prstDash val="solid"/>
-                      <a:round/>
-                      <a:headEnd len="sm" w="sm" type="none"/>
-                      <a:tailEnd len="sm" w="sm" type="none"/>
-                    </a:lnL>
-                    <a:lnR cap="flat" cmpd="sng" w="7625">
-                      <a:solidFill>
-                        <a:srgbClr val="000000"/>
-                      </a:solidFill>
-                      <a:prstDash val="solid"/>
-                      <a:round/>
-                      <a:headEnd len="sm" w="sm" type="none"/>
-                      <a:tailEnd len="sm" w="sm" type="none"/>
-                    </a:lnR>
-                    <a:lnT cap="flat" cmpd="sng" w="7625">
-                      <a:solidFill>
-                        <a:srgbClr val="000000"/>
-                      </a:solidFill>
-                      <a:prstDash val="solid"/>
-                      <a:round/>
-                      <a:headEnd len="sm" w="sm" type="none"/>
-                      <a:tailEnd len="sm" w="sm" type="none"/>
-                    </a:lnT>
-                    <a:lnB cap="flat" cmpd="sng" w="7625">
-                      <a:solidFill>
-                        <a:srgbClr val="000000"/>
-                      </a:solidFill>
-                      <a:prstDash val="solid"/>
-                      <a:round/>
-                      <a:headEnd len="sm" w="sm" type="none"/>
-                      <a:tailEnd len="sm" w="sm" type="none"/>
-                    </a:lnB>
-                  </a:tcPr>
-                </a:tc>
-              </a:tr>
-              <a:tr h="200025">
-                <a:tc>
-                  <a:txBody>
-                    <a:bodyPr/>
-                    <a:lstStyle/>
-                    <a:p>
-                      <a:pPr indent="0" lvl="0" marL="0" rtl="0" algn="l">
-                        <a:lnSpc>
-                          <a:spcPct val="115000"/>
-                        </a:lnSpc>
-                        <a:spcBef>
-                          <a:spcPts val="0"/>
-                        </a:spcBef>
-                        <a:spcAft>
-                          <a:spcPts val="0"/>
-                        </a:spcAft>
-                        <a:buNone/>
-                      </a:pPr>
-                      <a:r>
-                        <a:rPr lang="en" sz="1000"/>
-                        <a:t>B</a:t>
-                      </a:r>
-                      <a:endParaRPr sz="1000"/>
-                    </a:p>
-                  </a:txBody>
-                  <a:tcPr marT="19050" marB="19050" marR="28575" marL="28575" anchor="b">
-                    <a:lnL cap="flat" cmpd="sng" w="7625">
-                      <a:solidFill>
-                        <a:srgbClr val="000000"/>
-                      </a:solidFill>
-                      <a:prstDash val="solid"/>
-                      <a:round/>
-                      <a:headEnd len="sm" w="sm" type="none"/>
-                      <a:tailEnd len="sm" w="sm" type="none"/>
-                    </a:lnL>
-                    <a:lnR cap="flat" cmpd="sng" w="7625">
-                      <a:solidFill>
-                        <a:srgbClr val="000000"/>
-                      </a:solidFill>
-                      <a:prstDash val="solid"/>
-                      <a:round/>
-                      <a:headEnd len="sm" w="sm" type="none"/>
-                      <a:tailEnd len="sm" w="sm" type="none"/>
-                    </a:lnR>
-                    <a:lnT cap="flat" cmpd="sng" w="7625">
-                      <a:solidFill>
-                        <a:srgbClr val="000000"/>
-                      </a:solidFill>
-                      <a:prstDash val="solid"/>
-                      <a:round/>
-                      <a:headEnd len="sm" w="sm" type="none"/>
-                      <a:tailEnd len="sm" w="sm" type="none"/>
-                    </a:lnT>
-                    <a:lnB cap="flat" cmpd="sng" w="7625">
-                      <a:solidFill>
-                        <a:srgbClr val="000000"/>
-                      </a:solidFill>
-                      <a:prstDash val="solid"/>
-                      <a:round/>
-                      <a:headEnd len="sm" w="sm" type="none"/>
-                      <a:tailEnd len="sm" w="sm" type="none"/>
-                    </a:lnB>
-                  </a:tcPr>
-                </a:tc>
-                <a:tc>
-                  <a:txBody>
-                    <a:bodyPr/>
-                    <a:lstStyle/>
-                    <a:p>
-                      <a:pPr indent="0" lvl="0" marL="0" rtl="0" algn="l">
-                        <a:lnSpc>
-                          <a:spcPct val="115000"/>
-                        </a:lnSpc>
-                        <a:spcBef>
-                          <a:spcPts val="0"/>
-                        </a:spcBef>
-                        <a:spcAft>
-                          <a:spcPts val="0"/>
-                        </a:spcAft>
-                        <a:buNone/>
-                      </a:pPr>
-                      <a:r>
-                        <a:rPr lang="en" sz="1000"/>
-                        <a:t>Short Polling</a:t>
-                      </a:r>
-                      <a:endParaRPr sz="1000"/>
-                    </a:p>
-                  </a:txBody>
-                  <a:tcPr marT="19050" marB="19050" marR="28575" marL="28575" anchor="b">
-                    <a:lnL cap="flat" cmpd="sng" w="7625">
-                      <a:solidFill>
-                        <a:srgbClr val="000000"/>
-                      </a:solidFill>
-                      <a:prstDash val="solid"/>
-                      <a:round/>
-                      <a:headEnd len="sm" w="sm" type="none"/>
-                      <a:tailEnd len="sm" w="sm" type="none"/>
-                    </a:lnL>
-                    <a:lnR cap="flat" cmpd="sng" w="7625">
-                      <a:solidFill>
-                        <a:srgbClr val="000000"/>
-                      </a:solidFill>
-                      <a:prstDash val="solid"/>
-                      <a:round/>
-                      <a:headEnd len="sm" w="sm" type="none"/>
-                      <a:tailEnd len="sm" w="sm" type="none"/>
-                    </a:lnR>
-                    <a:lnT cap="flat" cmpd="sng" w="7625">
-                      <a:solidFill>
-                        <a:srgbClr val="000000"/>
-                      </a:solidFill>
-                      <a:prstDash val="solid"/>
-                      <a:round/>
-                      <a:headEnd len="sm" w="sm" type="none"/>
-                      <a:tailEnd len="sm" w="sm" type="none"/>
-                    </a:lnT>
-                    <a:lnB cap="flat" cmpd="sng" w="7625">
-                      <a:solidFill>
-                        <a:srgbClr val="000000"/>
-                      </a:solidFill>
-                      <a:prstDash val="solid"/>
-                      <a:round/>
-                      <a:headEnd len="sm" w="sm" type="none"/>
-                      <a:tailEnd len="sm" w="sm" type="none"/>
-                    </a:lnB>
-                  </a:tcPr>
-                </a:tc>
-                <a:tc>
-                  <a:txBody>
-                    <a:bodyPr/>
-                    <a:lstStyle/>
-                    <a:p>
-                      <a:pPr indent="0" lvl="0" marL="0" rtl="0" algn="r">
-                        <a:lnSpc>
-                          <a:spcPct val="115000"/>
-                        </a:lnSpc>
-                        <a:spcBef>
-                          <a:spcPts val="0"/>
-                        </a:spcBef>
-                        <a:spcAft>
-                          <a:spcPts val="0"/>
-                        </a:spcAft>
-                        <a:buNone/>
-                      </a:pPr>
-                      <a:r>
-                        <a:rPr lang="en" sz="1000"/>
-                        <a:t>2.0</a:t>
-                      </a:r>
-                      <a:endParaRPr sz="1000"/>
-                    </a:p>
-                  </a:txBody>
-                  <a:tcPr marT="19050" marB="19050" marR="28575" marL="28575" anchor="b">
-                    <a:lnL cap="flat" cmpd="sng" w="7625">
-                      <a:solidFill>
-                        <a:srgbClr val="000000"/>
-                      </a:solidFill>
-                      <a:prstDash val="solid"/>
-                      <a:round/>
-                      <a:headEnd len="sm" w="sm" type="none"/>
-                      <a:tailEnd len="sm" w="sm" type="none"/>
-                    </a:lnL>
-                    <a:lnR cap="flat" cmpd="sng" w="7625">
-                      <a:solidFill>
-                        <a:srgbClr val="000000"/>
-                      </a:solidFill>
-                      <a:prstDash val="solid"/>
-                      <a:round/>
-                      <a:headEnd len="sm" w="sm" type="none"/>
-                      <a:tailEnd len="sm" w="sm" type="none"/>
-                    </a:lnR>
-                    <a:lnT cap="flat" cmpd="sng" w="7625">
-                      <a:solidFill>
-                        <a:srgbClr val="000000"/>
-                      </a:solidFill>
-                      <a:prstDash val="solid"/>
-                      <a:round/>
-                      <a:headEnd len="sm" w="sm" type="none"/>
-                      <a:tailEnd len="sm" w="sm" type="none"/>
-                    </a:lnT>
-                    <a:lnB cap="flat" cmpd="sng" w="7625">
-                      <a:solidFill>
-                        <a:srgbClr val="000000"/>
-                      </a:solidFill>
-                      <a:prstDash val="solid"/>
-                      <a:round/>
-                      <a:headEnd len="sm" w="sm" type="none"/>
-                      <a:tailEnd len="sm" w="sm" type="none"/>
-                    </a:lnB>
-                  </a:tcPr>
-                </a:tc>
-                <a:tc>
-                  <a:txBody>
-                    <a:bodyPr/>
-                    <a:lstStyle/>
-                    <a:p>
-                      <a:pPr indent="0" lvl="0" marL="0" rtl="0" algn="r">
-                        <a:lnSpc>
-                          <a:spcPct val="115000"/>
-                        </a:lnSpc>
-                        <a:spcBef>
-                          <a:spcPts val="0"/>
-                        </a:spcBef>
-                        <a:spcAft>
-                          <a:spcPts val="0"/>
-                        </a:spcAft>
-                        <a:buNone/>
-                      </a:pPr>
-                      <a:r>
-                        <a:rPr lang="en" sz="1000"/>
-                        <a:t>2.0</a:t>
-                      </a:r>
-                      <a:endParaRPr sz="1000"/>
-                    </a:p>
-                  </a:txBody>
-                  <a:tcPr marT="19050" marB="19050" marR="28575" marL="28575" anchor="b">
-                    <a:lnL cap="flat" cmpd="sng" w="7625">
-                      <a:solidFill>
-                        <a:srgbClr val="000000"/>
-                      </a:solidFill>
-                      <a:prstDash val="solid"/>
-                      <a:round/>
-                      <a:headEnd len="sm" w="sm" type="none"/>
-                      <a:tailEnd len="sm" w="sm" type="none"/>
-                    </a:lnL>
-                    <a:lnR cap="flat" cmpd="sng" w="7625">
-                      <a:solidFill>
-                        <a:srgbClr val="000000"/>
-                      </a:solidFill>
-                      <a:prstDash val="solid"/>
-                      <a:round/>
-                      <a:headEnd len="sm" w="sm" type="none"/>
-                      <a:tailEnd len="sm" w="sm" type="none"/>
-                    </a:lnR>
-                    <a:lnT cap="flat" cmpd="sng" w="7625">
-                      <a:solidFill>
-                        <a:srgbClr val="000000"/>
-                      </a:solidFill>
-                      <a:prstDash val="solid"/>
-                      <a:round/>
-                      <a:headEnd len="sm" w="sm" type="none"/>
-                      <a:tailEnd len="sm" w="sm" type="none"/>
-                    </a:lnT>
-                    <a:lnB cap="flat" cmpd="sng" w="7625">
-                      <a:solidFill>
-                        <a:srgbClr val="000000"/>
-                      </a:solidFill>
-                      <a:prstDash val="solid"/>
-                      <a:round/>
-                      <a:headEnd len="sm" w="sm" type="none"/>
-                      <a:tailEnd len="sm" w="sm" type="none"/>
-                    </a:lnB>
-                  </a:tcPr>
-                </a:tc>
-                <a:tc>
-                  <a:txBody>
-                    <a:bodyPr/>
-                    <a:lstStyle/>
-                    <a:p>
-                      <a:pPr indent="0" lvl="0" marL="0" rtl="0" algn="r">
-                        <a:lnSpc>
-                          <a:spcPct val="115000"/>
-                        </a:lnSpc>
-                        <a:spcBef>
-                          <a:spcPts val="0"/>
-                        </a:spcBef>
-                        <a:spcAft>
-                          <a:spcPts val="0"/>
-                        </a:spcAft>
-                        <a:buNone/>
-                      </a:pPr>
-                      <a:r>
-                        <a:rPr lang="en" sz="1000"/>
-                        <a:t>2.0</a:t>
-                      </a:r>
-                      <a:endParaRPr sz="1000"/>
-                    </a:p>
-                  </a:txBody>
-                  <a:tcPr marT="19050" marB="19050" marR="28575" marL="28575" anchor="b">
-                    <a:lnL cap="flat" cmpd="sng" w="7625">
-                      <a:solidFill>
-                        <a:srgbClr val="000000"/>
-                      </a:solidFill>
-                      <a:prstDash val="solid"/>
-                      <a:round/>
-                      <a:headEnd len="sm" w="sm" type="none"/>
-                      <a:tailEnd len="sm" w="sm" type="none"/>
-                    </a:lnL>
-                    <a:lnR cap="flat" cmpd="sng" w="7625">
-                      <a:solidFill>
-                        <a:srgbClr val="000000"/>
-                      </a:solidFill>
-                      <a:prstDash val="solid"/>
-                      <a:round/>
-                      <a:headEnd len="sm" w="sm" type="none"/>
-                      <a:tailEnd len="sm" w="sm" type="none"/>
-                    </a:lnR>
-                    <a:lnT cap="flat" cmpd="sng" w="7625">
-                      <a:solidFill>
-                        <a:srgbClr val="000000"/>
-                      </a:solidFill>
-                      <a:prstDash val="solid"/>
-                      <a:round/>
-                      <a:headEnd len="sm" w="sm" type="none"/>
-                      <a:tailEnd len="sm" w="sm" type="none"/>
-                    </a:lnT>
-                    <a:lnB cap="flat" cmpd="sng" w="7625">
-                      <a:solidFill>
-                        <a:srgbClr val="000000"/>
-                      </a:solidFill>
-                      <a:prstDash val="solid"/>
-                      <a:round/>
-                      <a:headEnd len="sm" w="sm" type="none"/>
-                      <a:tailEnd len="sm" w="sm" type="none"/>
-                    </a:lnB>
-                  </a:tcPr>
-                </a:tc>
-                <a:tc>
-                  <a:txBody>
-                    <a:bodyPr/>
-                    <a:lstStyle/>
-                    <a:p>
-                      <a:pPr indent="0" lvl="0" marL="0" rtl="0" algn="r">
-                        <a:lnSpc>
-                          <a:spcPct val="115000"/>
-                        </a:lnSpc>
-                        <a:spcBef>
-                          <a:spcPts val="0"/>
-                        </a:spcBef>
-                        <a:spcAft>
-                          <a:spcPts val="0"/>
-                        </a:spcAft>
-                        <a:buNone/>
-                      </a:pPr>
-                      <a:r>
-                        <a:rPr lang="en" sz="1000"/>
-                        <a:t>295.0</a:t>
-                      </a:r>
-                      <a:endParaRPr sz="1000"/>
-                    </a:p>
-                  </a:txBody>
-                  <a:tcPr marT="19050" marB="19050" marR="28575" marL="28575" anchor="b">
-                    <a:lnL cap="flat" cmpd="sng" w="7625">
-                      <a:solidFill>
-                        <a:srgbClr val="000000"/>
-                      </a:solidFill>
-                      <a:prstDash val="solid"/>
-                      <a:round/>
-                      <a:headEnd len="sm" w="sm" type="none"/>
-                      <a:tailEnd len="sm" w="sm" type="none"/>
-                    </a:lnL>
-                    <a:lnR cap="flat" cmpd="sng" w="7625">
-                      <a:solidFill>
-                        <a:srgbClr val="000000"/>
-                      </a:solidFill>
-                      <a:prstDash val="solid"/>
-                      <a:round/>
-                      <a:headEnd len="sm" w="sm" type="none"/>
-                      <a:tailEnd len="sm" w="sm" type="none"/>
-                    </a:lnR>
-                    <a:lnT cap="flat" cmpd="sng" w="7625">
-                      <a:solidFill>
-                        <a:srgbClr val="000000"/>
-                      </a:solidFill>
-                      <a:prstDash val="solid"/>
-                      <a:round/>
-                      <a:headEnd len="sm" w="sm" type="none"/>
-                      <a:tailEnd len="sm" w="sm" type="none"/>
-                    </a:lnT>
-                    <a:lnB cap="flat" cmpd="sng" w="7625">
-                      <a:solidFill>
-                        <a:srgbClr val="000000"/>
-                      </a:solidFill>
-                      <a:prstDash val="solid"/>
-                      <a:round/>
-                      <a:headEnd len="sm" w="sm" type="none"/>
-                      <a:tailEnd len="sm" w="sm" type="none"/>
-                    </a:lnB>
-                  </a:tcPr>
-                </a:tc>
-              </a:tr>
-              <a:tr h="200025">
-                <a:tc>
-                  <a:txBody>
-                    <a:bodyPr/>
-                    <a:lstStyle/>
-                    <a:p>
-                      <a:pPr indent="0" lvl="0" marL="0" rtl="0" algn="l">
-                        <a:lnSpc>
-                          <a:spcPct val="115000"/>
-                        </a:lnSpc>
-                        <a:spcBef>
-                          <a:spcPts val="0"/>
-                        </a:spcBef>
-                        <a:spcAft>
-                          <a:spcPts val="0"/>
-                        </a:spcAft>
-                        <a:buNone/>
-                      </a:pPr>
-                      <a:r>
-                        <a:rPr lang="en" sz="1000"/>
-                        <a:t>B</a:t>
-                      </a:r>
-                      <a:endParaRPr sz="1000"/>
-                    </a:p>
-                  </a:txBody>
-                  <a:tcPr marT="19050" marB="19050" marR="28575" marL="28575" anchor="b">
-                    <a:lnL cap="flat" cmpd="sng" w="7625">
-                      <a:solidFill>
-                        <a:srgbClr val="000000"/>
-                      </a:solidFill>
-                      <a:prstDash val="solid"/>
-                      <a:round/>
-                      <a:headEnd len="sm" w="sm" type="none"/>
-                      <a:tailEnd len="sm" w="sm" type="none"/>
-                    </a:lnL>
-                    <a:lnR cap="flat" cmpd="sng" w="7625">
-                      <a:solidFill>
-                        <a:srgbClr val="000000"/>
-                      </a:solidFill>
-                      <a:prstDash val="solid"/>
-                      <a:round/>
-                      <a:headEnd len="sm" w="sm" type="none"/>
-                      <a:tailEnd len="sm" w="sm" type="none"/>
-                    </a:lnR>
-                    <a:lnT cap="flat" cmpd="sng" w="7625">
-                      <a:solidFill>
-                        <a:srgbClr val="000000"/>
-                      </a:solidFill>
-                      <a:prstDash val="solid"/>
-                      <a:round/>
-                      <a:headEnd len="sm" w="sm" type="none"/>
-                      <a:tailEnd len="sm" w="sm" type="none"/>
-                    </a:lnT>
-                    <a:lnB cap="flat" cmpd="sng" w="7625">
-                      <a:solidFill>
-                        <a:srgbClr val="000000"/>
-                      </a:solidFill>
-                      <a:prstDash val="solid"/>
-                      <a:round/>
-                      <a:headEnd len="sm" w="sm" type="none"/>
-                      <a:tailEnd len="sm" w="sm" type="none"/>
-                    </a:lnB>
-                  </a:tcPr>
-                </a:tc>
-                <a:tc>
-                  <a:txBody>
-                    <a:bodyPr/>
-                    <a:lstStyle/>
-                    <a:p>
-                      <a:pPr indent="0" lvl="0" marL="0" rtl="0" algn="l">
-                        <a:lnSpc>
-                          <a:spcPct val="115000"/>
-                        </a:lnSpc>
-                        <a:spcBef>
-                          <a:spcPts val="0"/>
-                        </a:spcBef>
-                        <a:spcAft>
-                          <a:spcPts val="0"/>
-                        </a:spcAft>
-                        <a:buNone/>
-                      </a:pPr>
-                      <a:r>
-                        <a:rPr lang="en" sz="1000"/>
-                        <a:t>Long Polling</a:t>
-                      </a:r>
-                      <a:endParaRPr sz="1000"/>
-                    </a:p>
-                  </a:txBody>
-                  <a:tcPr marT="19050" marB="19050" marR="28575" marL="28575" anchor="b">
-                    <a:lnL cap="flat" cmpd="sng" w="7625">
-                      <a:solidFill>
-                        <a:srgbClr val="000000"/>
-                      </a:solidFill>
-                      <a:prstDash val="solid"/>
-                      <a:round/>
-                      <a:headEnd len="sm" w="sm" type="none"/>
-                      <a:tailEnd len="sm" w="sm" type="none"/>
-                    </a:lnL>
-                    <a:lnR cap="flat" cmpd="sng" w="7625">
-                      <a:solidFill>
-                        <a:srgbClr val="000000"/>
-                      </a:solidFill>
-                      <a:prstDash val="solid"/>
-                      <a:round/>
-                      <a:headEnd len="sm" w="sm" type="none"/>
-                      <a:tailEnd len="sm" w="sm" type="none"/>
-                    </a:lnR>
-                    <a:lnT cap="flat" cmpd="sng" w="7625">
-                      <a:solidFill>
-                        <a:srgbClr val="000000"/>
-                      </a:solidFill>
-                      <a:prstDash val="solid"/>
-                      <a:round/>
-                      <a:headEnd len="sm" w="sm" type="none"/>
-                      <a:tailEnd len="sm" w="sm" type="none"/>
-                    </a:lnT>
-                    <a:lnB cap="flat" cmpd="sng" w="7625">
-                      <a:solidFill>
-                        <a:srgbClr val="000000"/>
-                      </a:solidFill>
-                      <a:prstDash val="solid"/>
-                      <a:round/>
-                      <a:headEnd len="sm" w="sm" type="none"/>
-                      <a:tailEnd len="sm" w="sm" type="none"/>
-                    </a:lnB>
-                  </a:tcPr>
-                </a:tc>
-                <a:tc>
-                  <a:txBody>
-                    <a:bodyPr/>
-                    <a:lstStyle/>
-                    <a:p>
-                      <a:pPr indent="0" lvl="0" marL="0" rtl="0" algn="r">
-                        <a:lnSpc>
-                          <a:spcPct val="115000"/>
-                        </a:lnSpc>
-                        <a:spcBef>
-                          <a:spcPts val="0"/>
-                        </a:spcBef>
-                        <a:spcAft>
-                          <a:spcPts val="0"/>
-                        </a:spcAft>
-                        <a:buNone/>
-                      </a:pPr>
-                      <a:r>
-                        <a:rPr lang="en" sz="1000"/>
-                        <a:t>4.0</a:t>
-                      </a:r>
-                      <a:endParaRPr sz="1000"/>
-                    </a:p>
-                  </a:txBody>
-                  <a:tcPr marT="19050" marB="19050" marR="28575" marL="28575" anchor="b">
-                    <a:lnL cap="flat" cmpd="sng" w="7625">
-                      <a:solidFill>
-                        <a:srgbClr val="000000"/>
-                      </a:solidFill>
-                      <a:prstDash val="solid"/>
-                      <a:round/>
-                      <a:headEnd len="sm" w="sm" type="none"/>
-                      <a:tailEnd len="sm" w="sm" type="none"/>
-                    </a:lnL>
-                    <a:lnR cap="flat" cmpd="sng" w="7625">
-                      <a:solidFill>
-                        <a:srgbClr val="000000"/>
-                      </a:solidFill>
-                      <a:prstDash val="solid"/>
-                      <a:round/>
-                      <a:headEnd len="sm" w="sm" type="none"/>
-                      <a:tailEnd len="sm" w="sm" type="none"/>
-                    </a:lnR>
-                    <a:lnT cap="flat" cmpd="sng" w="7625">
-                      <a:solidFill>
-                        <a:srgbClr val="000000"/>
-                      </a:solidFill>
-                      <a:prstDash val="solid"/>
-                      <a:round/>
-                      <a:headEnd len="sm" w="sm" type="none"/>
-                      <a:tailEnd len="sm" w="sm" type="none"/>
-                    </a:lnT>
-                    <a:lnB cap="flat" cmpd="sng" w="7625">
-                      <a:solidFill>
-                        <a:srgbClr val="000000"/>
-                      </a:solidFill>
-                      <a:prstDash val="solid"/>
-                      <a:round/>
-                      <a:headEnd len="sm" w="sm" type="none"/>
-                      <a:tailEnd len="sm" w="sm" type="none"/>
-                    </a:lnB>
-                  </a:tcPr>
-                </a:tc>
-                <a:tc>
-                  <a:txBody>
-                    <a:bodyPr/>
-                    <a:lstStyle/>
-                    <a:p>
-                      <a:pPr indent="0" lvl="0" marL="0" rtl="0" algn="r">
-                        <a:lnSpc>
-                          <a:spcPct val="115000"/>
-                        </a:lnSpc>
-                        <a:spcBef>
-                          <a:spcPts val="0"/>
-                        </a:spcBef>
-                        <a:spcAft>
-                          <a:spcPts val="0"/>
-                        </a:spcAft>
-                        <a:buNone/>
-                      </a:pPr>
-                      <a:r>
-                        <a:rPr lang="en" sz="1000"/>
-                        <a:t>5.0</a:t>
-                      </a:r>
-                      <a:endParaRPr sz="1000"/>
-                    </a:p>
-                  </a:txBody>
-                  <a:tcPr marT="19050" marB="19050" marR="28575" marL="28575" anchor="b">
-                    <a:lnL cap="flat" cmpd="sng" w="7625">
-                      <a:solidFill>
-                        <a:srgbClr val="000000"/>
-                      </a:solidFill>
-                      <a:prstDash val="solid"/>
-                      <a:round/>
-                      <a:headEnd len="sm" w="sm" type="none"/>
-                      <a:tailEnd len="sm" w="sm" type="none"/>
-                    </a:lnL>
-                    <a:lnR cap="flat" cmpd="sng" w="7625">
-                      <a:solidFill>
-                        <a:srgbClr val="000000"/>
-                      </a:solidFill>
-                      <a:prstDash val="solid"/>
-                      <a:round/>
-                      <a:headEnd len="sm" w="sm" type="none"/>
-                      <a:tailEnd len="sm" w="sm" type="none"/>
-                    </a:lnR>
-                    <a:lnT cap="flat" cmpd="sng" w="7625">
-                      <a:solidFill>
-                        <a:srgbClr val="000000"/>
-                      </a:solidFill>
-                      <a:prstDash val="solid"/>
-                      <a:round/>
-                      <a:headEnd len="sm" w="sm" type="none"/>
-                      <a:tailEnd len="sm" w="sm" type="none"/>
-                    </a:lnT>
-                    <a:lnB cap="flat" cmpd="sng" w="7625">
-                      <a:solidFill>
-                        <a:srgbClr val="000000"/>
-                      </a:solidFill>
-                      <a:prstDash val="solid"/>
-                      <a:round/>
-                      <a:headEnd len="sm" w="sm" type="none"/>
-                      <a:tailEnd len="sm" w="sm" type="none"/>
-                    </a:lnB>
-                  </a:tcPr>
-                </a:tc>
-                <a:tc>
-                  <a:txBody>
-                    <a:bodyPr/>
-                    <a:lstStyle/>
-                    <a:p>
-                      <a:pPr indent="0" lvl="0" marL="0" rtl="0" algn="r">
-                        <a:lnSpc>
-                          <a:spcPct val="115000"/>
-                        </a:lnSpc>
-                        <a:spcBef>
-                          <a:spcPts val="0"/>
-                        </a:spcBef>
-                        <a:spcAft>
-                          <a:spcPts val="0"/>
-                        </a:spcAft>
-                        <a:buNone/>
-                      </a:pPr>
-                      <a:r>
-                        <a:rPr lang="en" sz="1000"/>
-                        <a:t>4.3</a:t>
-                      </a:r>
-                      <a:endParaRPr sz="1000"/>
-                    </a:p>
-                  </a:txBody>
-                  <a:tcPr marT="19050" marB="19050" marR="28575" marL="28575" anchor="b">
-                    <a:lnL cap="flat" cmpd="sng" w="7625">
-                      <a:solidFill>
-                        <a:srgbClr val="000000"/>
-                      </a:solidFill>
-                      <a:prstDash val="solid"/>
-                      <a:round/>
-                      <a:headEnd len="sm" w="sm" type="none"/>
-                      <a:tailEnd len="sm" w="sm" type="none"/>
-                    </a:lnL>
-                    <a:lnR cap="flat" cmpd="sng" w="7625">
-                      <a:solidFill>
-                        <a:srgbClr val="000000"/>
-                      </a:solidFill>
-                      <a:prstDash val="solid"/>
-                      <a:round/>
-                      <a:headEnd len="sm" w="sm" type="none"/>
-                      <a:tailEnd len="sm" w="sm" type="none"/>
-                    </a:lnR>
-                    <a:lnT cap="flat" cmpd="sng" w="7625">
-                      <a:solidFill>
-                        <a:srgbClr val="000000"/>
-                      </a:solidFill>
-                      <a:prstDash val="solid"/>
-                      <a:round/>
-                      <a:headEnd len="sm" w="sm" type="none"/>
-                      <a:tailEnd len="sm" w="sm" type="none"/>
-                    </a:lnT>
-                    <a:lnB cap="flat" cmpd="sng" w="7625">
-                      <a:solidFill>
-                        <a:srgbClr val="000000"/>
-                      </a:solidFill>
-                      <a:prstDash val="solid"/>
-                      <a:round/>
-                      <a:headEnd len="sm" w="sm" type="none"/>
-                      <a:tailEnd len="sm" w="sm" type="none"/>
-                    </a:lnB>
-                  </a:tcPr>
-                </a:tc>
-                <a:tc>
-                  <a:txBody>
-                    <a:bodyPr/>
-                    <a:lstStyle/>
-                    <a:p>
-                      <a:pPr indent="0" lvl="0" marL="0" rtl="0" algn="r">
-                        <a:lnSpc>
-                          <a:spcPct val="115000"/>
-                        </a:lnSpc>
-                        <a:spcBef>
-                          <a:spcPts val="0"/>
-                        </a:spcBef>
-                        <a:spcAft>
-                          <a:spcPts val="0"/>
-                        </a:spcAft>
-                        <a:buNone/>
-                      </a:pPr>
-                      <a:r>
-                        <a:rPr lang="en" sz="1000"/>
-                        <a:t>65.3</a:t>
-                      </a:r>
-                      <a:endParaRPr sz="1000"/>
-                    </a:p>
-                  </a:txBody>
-                  <a:tcPr marT="19050" marB="19050" marR="28575" marL="28575" anchor="b">
-                    <a:lnL cap="flat" cmpd="sng" w="7625">
-                      <a:solidFill>
-                        <a:srgbClr val="000000"/>
-                      </a:solidFill>
-                      <a:prstDash val="solid"/>
-                      <a:round/>
-                      <a:headEnd len="sm" w="sm" type="none"/>
-                      <a:tailEnd len="sm" w="sm" type="none"/>
-                    </a:lnL>
-                    <a:lnR cap="flat" cmpd="sng" w="7625">
-                      <a:solidFill>
-                        <a:srgbClr val="000000"/>
-                      </a:solidFill>
-                      <a:prstDash val="solid"/>
-                      <a:round/>
-                      <a:headEnd len="sm" w="sm" type="none"/>
-                      <a:tailEnd len="sm" w="sm" type="none"/>
-                    </a:lnR>
-                    <a:lnT cap="flat" cmpd="sng" w="7625">
-                      <a:solidFill>
-                        <a:srgbClr val="000000"/>
-                      </a:solidFill>
-                      <a:prstDash val="solid"/>
-                      <a:round/>
-                      <a:headEnd len="sm" w="sm" type="none"/>
-                      <a:tailEnd len="sm" w="sm" type="none"/>
-                    </a:lnT>
-                    <a:lnB cap="flat" cmpd="sng" w="7625">
-                      <a:solidFill>
-                        <a:srgbClr val="000000"/>
-                      </a:solidFill>
-                      <a:prstDash val="solid"/>
-                      <a:round/>
-                      <a:headEnd len="sm" w="sm" type="none"/>
-                      <a:tailEnd len="sm" w="sm" type="none"/>
-                    </a:lnB>
-                  </a:tcPr>
-                </a:tc>
-              </a:tr>
-              <a:tr h="200025">
-                <a:tc>
-                  <a:txBody>
-                    <a:bodyPr/>
-                    <a:lstStyle/>
-                    <a:p>
-                      <a:pPr indent="0" lvl="0" marL="0" rtl="0" algn="l">
-                        <a:lnSpc>
-                          <a:spcPct val="115000"/>
-                        </a:lnSpc>
-                        <a:spcBef>
-                          <a:spcPts val="0"/>
-                        </a:spcBef>
-                        <a:spcAft>
-                          <a:spcPts val="0"/>
-                        </a:spcAft>
-                        <a:buNone/>
-                      </a:pPr>
-                      <a:r>
-                        <a:rPr lang="en" sz="1000"/>
-                        <a:t>C1</a:t>
-                      </a:r>
-                      <a:endParaRPr sz="1000"/>
-                    </a:p>
-                  </a:txBody>
-                  <a:tcPr marT="19050" marB="19050" marR="28575" marL="28575" anchor="b">
-                    <a:lnL cap="flat" cmpd="sng" w="7625">
-                      <a:solidFill>
-                        <a:srgbClr val="000000"/>
-                      </a:solidFill>
-                      <a:prstDash val="solid"/>
-                      <a:round/>
-                      <a:headEnd len="sm" w="sm" type="none"/>
-                      <a:tailEnd len="sm" w="sm" type="none"/>
-                    </a:lnL>
-                    <a:lnR cap="flat" cmpd="sng" w="7625">
-                      <a:solidFill>
-                        <a:srgbClr val="000000"/>
-                      </a:solidFill>
-                      <a:prstDash val="solid"/>
-                      <a:round/>
-                      <a:headEnd len="sm" w="sm" type="none"/>
-                      <a:tailEnd len="sm" w="sm" type="none"/>
-                    </a:lnR>
-                    <a:lnT cap="flat" cmpd="sng" w="7625">
-                      <a:solidFill>
-                        <a:srgbClr val="000000"/>
-                      </a:solidFill>
-                      <a:prstDash val="solid"/>
-                      <a:round/>
-                      <a:headEnd len="sm" w="sm" type="none"/>
-                      <a:tailEnd len="sm" w="sm" type="none"/>
-                    </a:lnT>
-                    <a:lnB cap="flat" cmpd="sng" w="7625">
-                      <a:solidFill>
-                        <a:srgbClr val="000000"/>
-                      </a:solidFill>
-                      <a:prstDash val="solid"/>
-                      <a:round/>
-                      <a:headEnd len="sm" w="sm" type="none"/>
-                      <a:tailEnd len="sm" w="sm" type="none"/>
-                    </a:lnB>
-                  </a:tcPr>
-                </a:tc>
-                <a:tc>
-                  <a:txBody>
-                    <a:bodyPr/>
-                    <a:lstStyle/>
-                    <a:p>
-                      <a:pPr indent="0" lvl="0" marL="0" rtl="0" algn="l">
-                        <a:lnSpc>
-                          <a:spcPct val="115000"/>
-                        </a:lnSpc>
-                        <a:spcBef>
-                          <a:spcPts val="0"/>
-                        </a:spcBef>
-                        <a:spcAft>
-                          <a:spcPts val="0"/>
-                        </a:spcAft>
-                        <a:buNone/>
-                      </a:pPr>
-                      <a:r>
-                        <a:rPr lang="en" sz="1000"/>
-                        <a:t>Short Polling</a:t>
-                      </a:r>
-                      <a:endParaRPr sz="1000"/>
-                    </a:p>
-                  </a:txBody>
-                  <a:tcPr marT="19050" marB="19050" marR="28575" marL="28575" anchor="b">
-                    <a:lnL cap="flat" cmpd="sng" w="7625">
-                      <a:solidFill>
-                        <a:srgbClr val="000000"/>
-                      </a:solidFill>
-                      <a:prstDash val="solid"/>
-                      <a:round/>
-                      <a:headEnd len="sm" w="sm" type="none"/>
-                      <a:tailEnd len="sm" w="sm" type="none"/>
-                    </a:lnL>
-                    <a:lnR cap="flat" cmpd="sng" w="7625">
-                      <a:solidFill>
-                        <a:srgbClr val="000000"/>
-                      </a:solidFill>
-                      <a:prstDash val="solid"/>
-                      <a:round/>
-                      <a:headEnd len="sm" w="sm" type="none"/>
-                      <a:tailEnd len="sm" w="sm" type="none"/>
-                    </a:lnR>
-                    <a:lnT cap="flat" cmpd="sng" w="7625">
-                      <a:solidFill>
-                        <a:srgbClr val="000000"/>
-                      </a:solidFill>
-                      <a:prstDash val="solid"/>
-                      <a:round/>
-                      <a:headEnd len="sm" w="sm" type="none"/>
-                      <a:tailEnd len="sm" w="sm" type="none"/>
-                    </a:lnT>
-                    <a:lnB cap="flat" cmpd="sng" w="7625">
-                      <a:solidFill>
-                        <a:srgbClr val="000000"/>
-                      </a:solidFill>
-                      <a:prstDash val="solid"/>
-                      <a:round/>
-                      <a:headEnd len="sm" w="sm" type="none"/>
-                      <a:tailEnd len="sm" w="sm" type="none"/>
-                    </a:lnB>
-                  </a:tcPr>
-                </a:tc>
-                <a:tc>
-                  <a:txBody>
-                    <a:bodyPr/>
-                    <a:lstStyle/>
-                    <a:p>
-                      <a:pPr indent="0" lvl="0" marL="0" rtl="0" algn="r">
-                        <a:lnSpc>
-                          <a:spcPct val="115000"/>
-                        </a:lnSpc>
-                        <a:spcBef>
-                          <a:spcPts val="0"/>
-                        </a:spcBef>
-                        <a:spcAft>
-                          <a:spcPts val="0"/>
-                        </a:spcAft>
-                        <a:buNone/>
-                      </a:pPr>
-                      <a:r>
-                        <a:rPr lang="en" sz="1000"/>
-                        <a:t>12.0</a:t>
-                      </a:r>
-                      <a:endParaRPr sz="1000"/>
-                    </a:p>
-                  </a:txBody>
-                  <a:tcPr marT="19050" marB="19050" marR="28575" marL="28575" anchor="b">
-                    <a:lnL cap="flat" cmpd="sng" w="7625">
-                      <a:solidFill>
-                        <a:srgbClr val="000000"/>
-                      </a:solidFill>
-                      <a:prstDash val="solid"/>
-                      <a:round/>
-                      <a:headEnd len="sm" w="sm" type="none"/>
-                      <a:tailEnd len="sm" w="sm" type="none"/>
-                    </a:lnL>
-                    <a:lnR cap="flat" cmpd="sng" w="7625">
-                      <a:solidFill>
-                        <a:srgbClr val="000000"/>
-                      </a:solidFill>
-                      <a:prstDash val="solid"/>
-                      <a:round/>
-                      <a:headEnd len="sm" w="sm" type="none"/>
-                      <a:tailEnd len="sm" w="sm" type="none"/>
-                    </a:lnR>
-                    <a:lnT cap="flat" cmpd="sng" w="7625">
-                      <a:solidFill>
-                        <a:srgbClr val="000000"/>
-                      </a:solidFill>
-                      <a:prstDash val="solid"/>
-                      <a:round/>
-                      <a:headEnd len="sm" w="sm" type="none"/>
-                      <a:tailEnd len="sm" w="sm" type="none"/>
-                    </a:lnT>
-                    <a:lnB cap="flat" cmpd="sng" w="7625">
-                      <a:solidFill>
-                        <a:srgbClr val="000000"/>
-                      </a:solidFill>
-                      <a:prstDash val="solid"/>
-                      <a:round/>
-                      <a:headEnd len="sm" w="sm" type="none"/>
-                      <a:tailEnd len="sm" w="sm" type="none"/>
-                    </a:lnB>
-                  </a:tcPr>
-                </a:tc>
-                <a:tc>
-                  <a:txBody>
-                    <a:bodyPr/>
-                    <a:lstStyle/>
-                    <a:p>
-                      <a:pPr indent="0" lvl="0" marL="0" rtl="0" algn="r">
-                        <a:lnSpc>
-                          <a:spcPct val="115000"/>
-                        </a:lnSpc>
-                        <a:spcBef>
-                          <a:spcPts val="0"/>
-                        </a:spcBef>
-                        <a:spcAft>
-                          <a:spcPts val="0"/>
-                        </a:spcAft>
-                        <a:buNone/>
-                      </a:pPr>
-                      <a:r>
-                        <a:rPr lang="en" sz="1000"/>
-                        <a:t>12.0</a:t>
-                      </a:r>
-                      <a:endParaRPr sz="1000"/>
-                    </a:p>
-                  </a:txBody>
-                  <a:tcPr marT="19050" marB="19050" marR="28575" marL="28575" anchor="b">
-                    <a:lnL cap="flat" cmpd="sng" w="7625">
-                      <a:solidFill>
-                        <a:srgbClr val="000000"/>
-                      </a:solidFill>
-                      <a:prstDash val="solid"/>
-                      <a:round/>
-                      <a:headEnd len="sm" w="sm" type="none"/>
-                      <a:tailEnd len="sm" w="sm" type="none"/>
-                    </a:lnL>
-                    <a:lnR cap="flat" cmpd="sng" w="7625">
-                      <a:solidFill>
-                        <a:srgbClr val="000000"/>
-                      </a:solidFill>
-                      <a:prstDash val="solid"/>
-                      <a:round/>
-                      <a:headEnd len="sm" w="sm" type="none"/>
-                      <a:tailEnd len="sm" w="sm" type="none"/>
-                    </a:lnR>
-                    <a:lnT cap="flat" cmpd="sng" w="7625">
-                      <a:solidFill>
-                        <a:srgbClr val="000000"/>
-                      </a:solidFill>
-                      <a:prstDash val="solid"/>
-                      <a:round/>
-                      <a:headEnd len="sm" w="sm" type="none"/>
-                      <a:tailEnd len="sm" w="sm" type="none"/>
-                    </a:lnT>
-                    <a:lnB cap="flat" cmpd="sng" w="7625">
-                      <a:solidFill>
-                        <a:srgbClr val="000000"/>
-                      </a:solidFill>
-                      <a:prstDash val="solid"/>
-                      <a:round/>
-                      <a:headEnd len="sm" w="sm" type="none"/>
-                      <a:tailEnd len="sm" w="sm" type="none"/>
-                    </a:lnB>
-                  </a:tcPr>
-                </a:tc>
-                <a:tc>
-                  <a:txBody>
-                    <a:bodyPr/>
-                    <a:lstStyle/>
-                    <a:p>
-                      <a:pPr indent="0" lvl="0" marL="0" rtl="0" algn="r">
-                        <a:lnSpc>
-                          <a:spcPct val="115000"/>
-                        </a:lnSpc>
-                        <a:spcBef>
-                          <a:spcPts val="0"/>
-                        </a:spcBef>
-                        <a:spcAft>
-                          <a:spcPts val="0"/>
-                        </a:spcAft>
-                        <a:buNone/>
-                      </a:pPr>
-                      <a:r>
-                        <a:rPr lang="en" sz="1000"/>
-                        <a:t>12.0</a:t>
-                      </a:r>
-                      <a:endParaRPr sz="1000"/>
-                    </a:p>
-                  </a:txBody>
-                  <a:tcPr marT="19050" marB="19050" marR="28575" marL="28575" anchor="b">
-                    <a:lnL cap="flat" cmpd="sng" w="7625">
-                      <a:solidFill>
-                        <a:srgbClr val="000000"/>
-                      </a:solidFill>
-                      <a:prstDash val="solid"/>
-                      <a:round/>
-                      <a:headEnd len="sm" w="sm" type="none"/>
-                      <a:tailEnd len="sm" w="sm" type="none"/>
-                    </a:lnL>
-                    <a:lnR cap="flat" cmpd="sng" w="7625">
-                      <a:solidFill>
-                        <a:srgbClr val="000000"/>
-                      </a:solidFill>
-                      <a:prstDash val="solid"/>
-                      <a:round/>
-                      <a:headEnd len="sm" w="sm" type="none"/>
-                      <a:tailEnd len="sm" w="sm" type="none"/>
-                    </a:lnR>
-                    <a:lnT cap="flat" cmpd="sng" w="7625">
-                      <a:solidFill>
-                        <a:srgbClr val="000000"/>
-                      </a:solidFill>
-                      <a:prstDash val="solid"/>
-                      <a:round/>
-                      <a:headEnd len="sm" w="sm" type="none"/>
-                      <a:tailEnd len="sm" w="sm" type="none"/>
-                    </a:lnT>
-                    <a:lnB cap="flat" cmpd="sng" w="7625">
-                      <a:solidFill>
-                        <a:srgbClr val="000000"/>
-                      </a:solidFill>
-                      <a:prstDash val="solid"/>
-                      <a:round/>
-                      <a:headEnd len="sm" w="sm" type="none"/>
-                      <a:tailEnd len="sm" w="sm" type="none"/>
-                    </a:lnB>
-                  </a:tcPr>
-                </a:tc>
-                <a:tc>
-                  <a:txBody>
-                    <a:bodyPr/>
-                    <a:lstStyle/>
-                    <a:p>
-                      <a:pPr indent="0" lvl="0" marL="0" rtl="0" algn="r">
-                        <a:lnSpc>
-                          <a:spcPct val="115000"/>
-                        </a:lnSpc>
-                        <a:spcBef>
-                          <a:spcPts val="0"/>
-                        </a:spcBef>
-                        <a:spcAft>
-                          <a:spcPts val="0"/>
-                        </a:spcAft>
-                        <a:buNone/>
-                      </a:pPr>
-                      <a:r>
-                        <a:rPr lang="en" sz="1000"/>
-                        <a:t>328.3</a:t>
-                      </a:r>
-                      <a:endParaRPr sz="1000"/>
-                    </a:p>
-                  </a:txBody>
-                  <a:tcPr marT="19050" marB="19050" marR="28575" marL="28575" anchor="b">
-                    <a:lnL cap="flat" cmpd="sng" w="7625">
-                      <a:solidFill>
-                        <a:srgbClr val="000000"/>
-                      </a:solidFill>
-                      <a:prstDash val="solid"/>
-                      <a:round/>
-                      <a:headEnd len="sm" w="sm" type="none"/>
-                      <a:tailEnd len="sm" w="sm" type="none"/>
-                    </a:lnL>
-                    <a:lnR cap="flat" cmpd="sng" w="7625">
-                      <a:solidFill>
-                        <a:srgbClr val="000000"/>
-                      </a:solidFill>
-                      <a:prstDash val="solid"/>
-                      <a:round/>
-                      <a:headEnd len="sm" w="sm" type="none"/>
-                      <a:tailEnd len="sm" w="sm" type="none"/>
-                    </a:lnR>
-                    <a:lnT cap="flat" cmpd="sng" w="7625">
-                      <a:solidFill>
-                        <a:srgbClr val="000000"/>
-                      </a:solidFill>
-                      <a:prstDash val="solid"/>
-                      <a:round/>
-                      <a:headEnd len="sm" w="sm" type="none"/>
-                      <a:tailEnd len="sm" w="sm" type="none"/>
-                    </a:lnT>
-                    <a:lnB cap="flat" cmpd="sng" w="7625">
-                      <a:solidFill>
-                        <a:srgbClr val="000000"/>
-                      </a:solidFill>
-                      <a:prstDash val="solid"/>
-                      <a:round/>
-                      <a:headEnd len="sm" w="sm" type="none"/>
-                      <a:tailEnd len="sm" w="sm" type="none"/>
-                    </a:lnB>
-                  </a:tcPr>
-                </a:tc>
-              </a:tr>
-              <a:tr h="200025">
-                <a:tc>
-                  <a:txBody>
-                    <a:bodyPr/>
-                    <a:lstStyle/>
-                    <a:p>
-                      <a:pPr indent="0" lvl="0" marL="0" rtl="0" algn="l">
-                        <a:lnSpc>
-                          <a:spcPct val="115000"/>
-                        </a:lnSpc>
-                        <a:spcBef>
-                          <a:spcPts val="0"/>
-                        </a:spcBef>
-                        <a:spcAft>
-                          <a:spcPts val="0"/>
-                        </a:spcAft>
-                        <a:buNone/>
-                      </a:pPr>
-                      <a:r>
-                        <a:rPr lang="en" sz="1000"/>
-                        <a:t>C1</a:t>
-                      </a:r>
-                      <a:endParaRPr sz="1000"/>
-                    </a:p>
-                  </a:txBody>
-                  <a:tcPr marT="19050" marB="19050" marR="28575" marL="28575" anchor="b">
-                    <a:lnL cap="flat" cmpd="sng" w="7625">
-                      <a:solidFill>
-                        <a:srgbClr val="000000"/>
-                      </a:solidFill>
-                      <a:prstDash val="solid"/>
-                      <a:round/>
-                      <a:headEnd len="sm" w="sm" type="none"/>
-                      <a:tailEnd len="sm" w="sm" type="none"/>
-                    </a:lnL>
-                    <a:lnR cap="flat" cmpd="sng" w="7625">
-                      <a:solidFill>
-                        <a:srgbClr val="000000"/>
-                      </a:solidFill>
-                      <a:prstDash val="solid"/>
-                      <a:round/>
-                      <a:headEnd len="sm" w="sm" type="none"/>
-                      <a:tailEnd len="sm" w="sm" type="none"/>
-                    </a:lnR>
-                    <a:lnT cap="flat" cmpd="sng" w="7625">
-                      <a:solidFill>
-                        <a:srgbClr val="000000"/>
-                      </a:solidFill>
-                      <a:prstDash val="solid"/>
-                      <a:round/>
-                      <a:headEnd len="sm" w="sm" type="none"/>
-                      <a:tailEnd len="sm" w="sm" type="none"/>
-                    </a:lnT>
-                    <a:lnB cap="flat" cmpd="sng" w="7625">
-                      <a:solidFill>
-                        <a:srgbClr val="000000"/>
-                      </a:solidFill>
-                      <a:prstDash val="solid"/>
-                      <a:round/>
-                      <a:headEnd len="sm" w="sm" type="none"/>
-                      <a:tailEnd len="sm" w="sm" type="none"/>
-                    </a:lnB>
-                  </a:tcPr>
-                </a:tc>
-                <a:tc>
-                  <a:txBody>
-                    <a:bodyPr/>
-                    <a:lstStyle/>
-                    <a:p>
-                      <a:pPr indent="0" lvl="0" marL="0" rtl="0" algn="l">
-                        <a:lnSpc>
-                          <a:spcPct val="115000"/>
-                        </a:lnSpc>
-                        <a:spcBef>
-                          <a:spcPts val="0"/>
-                        </a:spcBef>
-                        <a:spcAft>
-                          <a:spcPts val="0"/>
-                        </a:spcAft>
-                        <a:buNone/>
-                      </a:pPr>
-                      <a:r>
-                        <a:rPr lang="en" sz="1000"/>
-                        <a:t>Long Polling</a:t>
-                      </a:r>
-                      <a:endParaRPr sz="1000"/>
-                    </a:p>
-                  </a:txBody>
-                  <a:tcPr marT="19050" marB="19050" marR="28575" marL="28575" anchor="b">
-                    <a:lnL cap="flat" cmpd="sng" w="7625">
-                      <a:solidFill>
-                        <a:srgbClr val="000000"/>
-                      </a:solidFill>
-                      <a:prstDash val="solid"/>
-                      <a:round/>
-                      <a:headEnd len="sm" w="sm" type="none"/>
-                      <a:tailEnd len="sm" w="sm" type="none"/>
-                    </a:lnL>
-                    <a:lnR cap="flat" cmpd="sng" w="7625">
-                      <a:solidFill>
-                        <a:srgbClr val="000000"/>
-                      </a:solidFill>
-                      <a:prstDash val="solid"/>
-                      <a:round/>
-                      <a:headEnd len="sm" w="sm" type="none"/>
-                      <a:tailEnd len="sm" w="sm" type="none"/>
-                    </a:lnR>
-                    <a:lnT cap="flat" cmpd="sng" w="7625">
-                      <a:solidFill>
-                        <a:srgbClr val="000000"/>
-                      </a:solidFill>
-                      <a:prstDash val="solid"/>
-                      <a:round/>
-                      <a:headEnd len="sm" w="sm" type="none"/>
-                      <a:tailEnd len="sm" w="sm" type="none"/>
-                    </a:lnT>
-                    <a:lnB cap="flat" cmpd="sng" w="7625">
-                      <a:solidFill>
-                        <a:srgbClr val="000000"/>
-                      </a:solidFill>
-                      <a:prstDash val="solid"/>
-                      <a:round/>
-                      <a:headEnd len="sm" w="sm" type="none"/>
-                      <a:tailEnd len="sm" w="sm" type="none"/>
-                    </a:lnB>
-                  </a:tcPr>
-                </a:tc>
-                <a:tc>
-                  <a:txBody>
-                    <a:bodyPr/>
-                    <a:lstStyle/>
-                    <a:p>
-                      <a:pPr indent="0" lvl="0" marL="0" rtl="0" algn="r">
-                        <a:lnSpc>
-                          <a:spcPct val="115000"/>
-                        </a:lnSpc>
-                        <a:spcBef>
-                          <a:spcPts val="0"/>
-                        </a:spcBef>
-                        <a:spcAft>
-                          <a:spcPts val="0"/>
-                        </a:spcAft>
-                        <a:buNone/>
-                      </a:pPr>
-                      <a:r>
-                        <a:rPr lang="en" sz="1000"/>
-                        <a:t>9.0</a:t>
-                      </a:r>
-                      <a:endParaRPr sz="1000"/>
-                    </a:p>
-                  </a:txBody>
-                  <a:tcPr marT="19050" marB="19050" marR="28575" marL="28575" anchor="b">
-                    <a:lnL cap="flat" cmpd="sng" w="7625">
-                      <a:solidFill>
-                        <a:srgbClr val="000000"/>
-                      </a:solidFill>
-                      <a:prstDash val="solid"/>
-                      <a:round/>
-                      <a:headEnd len="sm" w="sm" type="none"/>
-                      <a:tailEnd len="sm" w="sm" type="none"/>
-                    </a:lnL>
-                    <a:lnR cap="flat" cmpd="sng" w="7625">
-                      <a:solidFill>
-                        <a:srgbClr val="000000"/>
-                      </a:solidFill>
-                      <a:prstDash val="solid"/>
-                      <a:round/>
-                      <a:headEnd len="sm" w="sm" type="none"/>
-                      <a:tailEnd len="sm" w="sm" type="none"/>
-                    </a:lnR>
-                    <a:lnT cap="flat" cmpd="sng" w="7625">
-                      <a:solidFill>
-                        <a:srgbClr val="000000"/>
-                      </a:solidFill>
-                      <a:prstDash val="solid"/>
-                      <a:round/>
-                      <a:headEnd len="sm" w="sm" type="none"/>
-                      <a:tailEnd len="sm" w="sm" type="none"/>
-                    </a:lnT>
-                    <a:lnB cap="flat" cmpd="sng" w="7625">
-                      <a:solidFill>
-                        <a:srgbClr val="000000"/>
-                      </a:solidFill>
-                      <a:prstDash val="solid"/>
-                      <a:round/>
-                      <a:headEnd len="sm" w="sm" type="none"/>
-                      <a:tailEnd len="sm" w="sm" type="none"/>
-                    </a:lnB>
-                  </a:tcPr>
-                </a:tc>
-                <a:tc>
-                  <a:txBody>
-                    <a:bodyPr/>
-                    <a:lstStyle/>
-                    <a:p>
-                      <a:pPr indent="0" lvl="0" marL="0" rtl="0" algn="r">
-                        <a:lnSpc>
-                          <a:spcPct val="115000"/>
-                        </a:lnSpc>
-                        <a:spcBef>
-                          <a:spcPts val="0"/>
-                        </a:spcBef>
-                        <a:spcAft>
-                          <a:spcPts val="0"/>
-                        </a:spcAft>
-                        <a:buNone/>
-                      </a:pPr>
-                      <a:r>
-                        <a:rPr lang="en" sz="1000"/>
-                        <a:t>10.0</a:t>
-                      </a:r>
-                      <a:endParaRPr sz="1000"/>
-                    </a:p>
-                  </a:txBody>
-                  <a:tcPr marT="19050" marB="19050" marR="28575" marL="28575" anchor="b">
-                    <a:lnL cap="flat" cmpd="sng" w="7625">
-                      <a:solidFill>
-                        <a:srgbClr val="000000"/>
-                      </a:solidFill>
-                      <a:prstDash val="solid"/>
-                      <a:round/>
-                      <a:headEnd len="sm" w="sm" type="none"/>
-                      <a:tailEnd len="sm" w="sm" type="none"/>
-                    </a:lnL>
-                    <a:lnR cap="flat" cmpd="sng" w="7625">
-                      <a:solidFill>
-                        <a:srgbClr val="000000"/>
-                      </a:solidFill>
-                      <a:prstDash val="solid"/>
-                      <a:round/>
-                      <a:headEnd len="sm" w="sm" type="none"/>
-                      <a:tailEnd len="sm" w="sm" type="none"/>
-                    </a:lnR>
-                    <a:lnT cap="flat" cmpd="sng" w="7625">
-                      <a:solidFill>
-                        <a:srgbClr val="000000"/>
-                      </a:solidFill>
-                      <a:prstDash val="solid"/>
-                      <a:round/>
-                      <a:headEnd len="sm" w="sm" type="none"/>
-                      <a:tailEnd len="sm" w="sm" type="none"/>
-                    </a:lnT>
-                    <a:lnB cap="flat" cmpd="sng" w="7625">
-                      <a:solidFill>
-                        <a:srgbClr val="000000"/>
-                      </a:solidFill>
-                      <a:prstDash val="solid"/>
-                      <a:round/>
-                      <a:headEnd len="sm" w="sm" type="none"/>
-                      <a:tailEnd len="sm" w="sm" type="none"/>
-                    </a:lnB>
-                  </a:tcPr>
-                </a:tc>
-                <a:tc>
-                  <a:txBody>
-                    <a:bodyPr/>
-                    <a:lstStyle/>
-                    <a:p>
-                      <a:pPr indent="0" lvl="0" marL="0" rtl="0" algn="r">
-                        <a:lnSpc>
-                          <a:spcPct val="115000"/>
-                        </a:lnSpc>
-                        <a:spcBef>
-                          <a:spcPts val="0"/>
-                        </a:spcBef>
-                        <a:spcAft>
-                          <a:spcPts val="0"/>
-                        </a:spcAft>
-                        <a:buNone/>
-                      </a:pPr>
-                      <a:r>
-                        <a:rPr lang="en" sz="1000"/>
-                        <a:t>9.7</a:t>
-                      </a:r>
-                      <a:endParaRPr sz="1000"/>
-                    </a:p>
-                  </a:txBody>
-                  <a:tcPr marT="19050" marB="19050" marR="28575" marL="28575" anchor="b">
-                    <a:lnL cap="flat" cmpd="sng" w="7625">
-                      <a:solidFill>
-                        <a:srgbClr val="000000"/>
-                      </a:solidFill>
-                      <a:prstDash val="solid"/>
-                      <a:round/>
-                      <a:headEnd len="sm" w="sm" type="none"/>
-                      <a:tailEnd len="sm" w="sm" type="none"/>
-                    </a:lnL>
-                    <a:lnR cap="flat" cmpd="sng" w="7625">
-                      <a:solidFill>
-                        <a:srgbClr val="000000"/>
-                      </a:solidFill>
-                      <a:prstDash val="solid"/>
-                      <a:round/>
-                      <a:headEnd len="sm" w="sm" type="none"/>
-                      <a:tailEnd len="sm" w="sm" type="none"/>
-                    </a:lnR>
-                    <a:lnT cap="flat" cmpd="sng" w="7625">
-                      <a:solidFill>
-                        <a:srgbClr val="000000"/>
-                      </a:solidFill>
-                      <a:prstDash val="solid"/>
-                      <a:round/>
-                      <a:headEnd len="sm" w="sm" type="none"/>
-                      <a:tailEnd len="sm" w="sm" type="none"/>
-                    </a:lnT>
-                    <a:lnB cap="flat" cmpd="sng" w="7625">
-                      <a:solidFill>
-                        <a:srgbClr val="000000"/>
-                      </a:solidFill>
-                      <a:prstDash val="solid"/>
-                      <a:round/>
-                      <a:headEnd len="sm" w="sm" type="none"/>
-                      <a:tailEnd len="sm" w="sm" type="none"/>
-                    </a:lnB>
-                  </a:tcPr>
-                </a:tc>
-                <a:tc>
-                  <a:txBody>
-                    <a:bodyPr/>
-                    <a:lstStyle/>
-                    <a:p>
-                      <a:pPr indent="0" lvl="0" marL="0" rtl="0" algn="r">
-                        <a:lnSpc>
-                          <a:spcPct val="115000"/>
-                        </a:lnSpc>
-                        <a:spcBef>
-                          <a:spcPts val="0"/>
-                        </a:spcBef>
-                        <a:spcAft>
-                          <a:spcPts val="0"/>
-                        </a:spcAft>
-                        <a:buNone/>
-                      </a:pPr>
-                      <a:r>
-                        <a:rPr lang="en" sz="1000"/>
-                        <a:t>92.7</a:t>
-                      </a:r>
-                      <a:endParaRPr sz="1000"/>
-                    </a:p>
-                  </a:txBody>
-                  <a:tcPr marT="19050" marB="19050" marR="28575" marL="28575" anchor="b">
-                    <a:lnL cap="flat" cmpd="sng" w="7625">
-                      <a:solidFill>
-                        <a:srgbClr val="000000"/>
-                      </a:solidFill>
-                      <a:prstDash val="solid"/>
-                      <a:round/>
-                      <a:headEnd len="sm" w="sm" type="none"/>
-                      <a:tailEnd len="sm" w="sm" type="none"/>
-                    </a:lnL>
-                    <a:lnR cap="flat" cmpd="sng" w="7625">
-                      <a:solidFill>
-                        <a:srgbClr val="000000"/>
-                      </a:solidFill>
-                      <a:prstDash val="solid"/>
-                      <a:round/>
-                      <a:headEnd len="sm" w="sm" type="none"/>
-                      <a:tailEnd len="sm" w="sm" type="none"/>
-                    </a:lnR>
-                    <a:lnT cap="flat" cmpd="sng" w="7625">
-                      <a:solidFill>
-                        <a:srgbClr val="000000"/>
-                      </a:solidFill>
-                      <a:prstDash val="solid"/>
-                      <a:round/>
-                      <a:headEnd len="sm" w="sm" type="none"/>
-                      <a:tailEnd len="sm" w="sm" type="none"/>
-                    </a:lnT>
-                    <a:lnB cap="flat" cmpd="sng" w="7625">
-                      <a:solidFill>
-                        <a:srgbClr val="000000"/>
-                      </a:solidFill>
-                      <a:prstDash val="solid"/>
-                      <a:round/>
-                      <a:headEnd len="sm" w="sm" type="none"/>
-                      <a:tailEnd len="sm" w="sm" type="none"/>
-                    </a:lnB>
-                  </a:tcPr>
-                </a:tc>
-              </a:tr>
-              <a:tr h="200025">
-                <a:tc>
-                  <a:txBody>
-                    <a:bodyPr/>
-                    <a:lstStyle/>
-                    <a:p>
-                      <a:pPr indent="0" lvl="0" marL="0" rtl="0" algn="l">
-                        <a:lnSpc>
-                          <a:spcPct val="115000"/>
-                        </a:lnSpc>
-                        <a:spcBef>
-                          <a:spcPts val="0"/>
-                        </a:spcBef>
-                        <a:spcAft>
-                          <a:spcPts val="0"/>
-                        </a:spcAft>
-                        <a:buNone/>
-                      </a:pPr>
-                      <a:r>
-                        <a:rPr lang="en" sz="1000"/>
-                        <a:t>C2</a:t>
-                      </a:r>
-                      <a:endParaRPr sz="1000"/>
-                    </a:p>
-                  </a:txBody>
-                  <a:tcPr marT="19050" marB="19050" marR="28575" marL="28575" anchor="b">
-                    <a:lnL cap="flat" cmpd="sng" w="7625">
-                      <a:solidFill>
-                        <a:srgbClr val="000000"/>
-                      </a:solidFill>
-                      <a:prstDash val="solid"/>
-                      <a:round/>
-                      <a:headEnd len="sm" w="sm" type="none"/>
-                      <a:tailEnd len="sm" w="sm" type="none"/>
-                    </a:lnL>
-                    <a:lnR cap="flat" cmpd="sng" w="7625">
-                      <a:solidFill>
-                        <a:srgbClr val="000000"/>
-                      </a:solidFill>
-                      <a:prstDash val="solid"/>
-                      <a:round/>
-                      <a:headEnd len="sm" w="sm" type="none"/>
-                      <a:tailEnd len="sm" w="sm" type="none"/>
-                    </a:lnR>
-                    <a:lnT cap="flat" cmpd="sng" w="7625">
-                      <a:solidFill>
-                        <a:srgbClr val="000000"/>
-                      </a:solidFill>
-                      <a:prstDash val="solid"/>
-                      <a:round/>
-                      <a:headEnd len="sm" w="sm" type="none"/>
-                      <a:tailEnd len="sm" w="sm" type="none"/>
-                    </a:lnT>
-                    <a:lnB cap="flat" cmpd="sng" w="7625">
-                      <a:solidFill>
-                        <a:srgbClr val="000000"/>
-                      </a:solidFill>
-                      <a:prstDash val="solid"/>
-                      <a:round/>
-                      <a:headEnd len="sm" w="sm" type="none"/>
-                      <a:tailEnd len="sm" w="sm" type="none"/>
-                    </a:lnB>
-                  </a:tcPr>
-                </a:tc>
-                <a:tc>
-                  <a:txBody>
-                    <a:bodyPr/>
-                    <a:lstStyle/>
-                    <a:p>
-                      <a:pPr indent="0" lvl="0" marL="0" rtl="0" algn="l">
-                        <a:lnSpc>
-                          <a:spcPct val="115000"/>
-                        </a:lnSpc>
-                        <a:spcBef>
-                          <a:spcPts val="0"/>
-                        </a:spcBef>
-                        <a:spcAft>
-                          <a:spcPts val="0"/>
-                        </a:spcAft>
-                        <a:buNone/>
-                      </a:pPr>
-                      <a:r>
-                        <a:rPr lang="en" sz="1000"/>
-                        <a:t>Short Polling</a:t>
-                      </a:r>
-                      <a:endParaRPr sz="1000"/>
-                    </a:p>
-                  </a:txBody>
-                  <a:tcPr marT="19050" marB="19050" marR="28575" marL="28575" anchor="b">
-                    <a:lnL cap="flat" cmpd="sng" w="7625">
-                      <a:solidFill>
-                        <a:srgbClr val="000000"/>
-                      </a:solidFill>
-                      <a:prstDash val="solid"/>
-                      <a:round/>
-                      <a:headEnd len="sm" w="sm" type="none"/>
-                      <a:tailEnd len="sm" w="sm" type="none"/>
-                    </a:lnL>
-                    <a:lnR cap="flat" cmpd="sng" w="7625">
-                      <a:solidFill>
-                        <a:srgbClr val="000000"/>
-                      </a:solidFill>
-                      <a:prstDash val="solid"/>
-                      <a:round/>
-                      <a:headEnd len="sm" w="sm" type="none"/>
-                      <a:tailEnd len="sm" w="sm" type="none"/>
-                    </a:lnR>
-                    <a:lnT cap="flat" cmpd="sng" w="7625">
-                      <a:solidFill>
-                        <a:srgbClr val="000000"/>
-                      </a:solidFill>
-                      <a:prstDash val="solid"/>
-                      <a:round/>
-                      <a:headEnd len="sm" w="sm" type="none"/>
-                      <a:tailEnd len="sm" w="sm" type="none"/>
-                    </a:lnT>
-                    <a:lnB cap="flat" cmpd="sng" w="7625">
-                      <a:solidFill>
-                        <a:srgbClr val="000000"/>
-                      </a:solidFill>
-                      <a:prstDash val="solid"/>
-                      <a:round/>
-                      <a:headEnd len="sm" w="sm" type="none"/>
-                      <a:tailEnd len="sm" w="sm" type="none"/>
-                    </a:lnB>
-                  </a:tcPr>
-                </a:tc>
-                <a:tc>
-                  <a:txBody>
-                    <a:bodyPr/>
-                    <a:lstStyle/>
-                    <a:p>
-                      <a:pPr indent="0" lvl="0" marL="0" rtl="0" algn="r">
-                        <a:lnSpc>
-                          <a:spcPct val="115000"/>
-                        </a:lnSpc>
-                        <a:spcBef>
-                          <a:spcPts val="0"/>
-                        </a:spcBef>
-                        <a:spcAft>
-                          <a:spcPts val="0"/>
-                        </a:spcAft>
-                        <a:buNone/>
-                      </a:pPr>
-                      <a:r>
-                        <a:rPr lang="en" sz="1000"/>
-                        <a:t>12.0</a:t>
-                      </a:r>
-                      <a:endParaRPr sz="1000"/>
-                    </a:p>
-                  </a:txBody>
-                  <a:tcPr marT="19050" marB="19050" marR="28575" marL="28575" anchor="b">
-                    <a:lnL cap="flat" cmpd="sng" w="7625">
-                      <a:solidFill>
-                        <a:srgbClr val="000000"/>
-                      </a:solidFill>
-                      <a:prstDash val="solid"/>
-                      <a:round/>
-                      <a:headEnd len="sm" w="sm" type="none"/>
-                      <a:tailEnd len="sm" w="sm" type="none"/>
-                    </a:lnL>
-                    <a:lnR cap="flat" cmpd="sng" w="7625">
-                      <a:solidFill>
-                        <a:srgbClr val="000000"/>
-                      </a:solidFill>
-                      <a:prstDash val="solid"/>
-                      <a:round/>
-                      <a:headEnd len="sm" w="sm" type="none"/>
-                      <a:tailEnd len="sm" w="sm" type="none"/>
-                    </a:lnR>
-                    <a:lnT cap="flat" cmpd="sng" w="7625">
-                      <a:solidFill>
-                        <a:srgbClr val="000000"/>
-                      </a:solidFill>
-                      <a:prstDash val="solid"/>
-                      <a:round/>
-                      <a:headEnd len="sm" w="sm" type="none"/>
-                      <a:tailEnd len="sm" w="sm" type="none"/>
-                    </a:lnT>
-                    <a:lnB cap="flat" cmpd="sng" w="7625">
-                      <a:solidFill>
-                        <a:srgbClr val="000000"/>
-                      </a:solidFill>
-                      <a:prstDash val="solid"/>
-                      <a:round/>
-                      <a:headEnd len="sm" w="sm" type="none"/>
-                      <a:tailEnd len="sm" w="sm" type="none"/>
-                    </a:lnB>
-                  </a:tcPr>
-                </a:tc>
-                <a:tc>
-                  <a:txBody>
-                    <a:bodyPr/>
-                    <a:lstStyle/>
-                    <a:p>
-                      <a:pPr indent="0" lvl="0" marL="0" rtl="0" algn="r">
-                        <a:lnSpc>
-                          <a:spcPct val="115000"/>
-                        </a:lnSpc>
-                        <a:spcBef>
-                          <a:spcPts val="0"/>
-                        </a:spcBef>
-                        <a:spcAft>
-                          <a:spcPts val="0"/>
-                        </a:spcAft>
-                        <a:buNone/>
-                      </a:pPr>
-                      <a:r>
-                        <a:rPr lang="en" sz="1000"/>
-                        <a:t>12.0</a:t>
-                      </a:r>
-                      <a:endParaRPr sz="1000"/>
-                    </a:p>
-                  </a:txBody>
-                  <a:tcPr marT="19050" marB="19050" marR="28575" marL="28575" anchor="b">
-                    <a:lnL cap="flat" cmpd="sng" w="7625">
-                      <a:solidFill>
-                        <a:srgbClr val="000000"/>
-                      </a:solidFill>
-                      <a:prstDash val="solid"/>
-                      <a:round/>
-                      <a:headEnd len="sm" w="sm" type="none"/>
-                      <a:tailEnd len="sm" w="sm" type="none"/>
-                    </a:lnL>
-                    <a:lnR cap="flat" cmpd="sng" w="7625">
-                      <a:solidFill>
-                        <a:srgbClr val="000000"/>
-                      </a:solidFill>
-                      <a:prstDash val="solid"/>
-                      <a:round/>
-                      <a:headEnd len="sm" w="sm" type="none"/>
-                      <a:tailEnd len="sm" w="sm" type="none"/>
-                    </a:lnR>
-                    <a:lnT cap="flat" cmpd="sng" w="7625">
-                      <a:solidFill>
-                        <a:srgbClr val="000000"/>
-                      </a:solidFill>
-                      <a:prstDash val="solid"/>
-                      <a:round/>
-                      <a:headEnd len="sm" w="sm" type="none"/>
-                      <a:tailEnd len="sm" w="sm" type="none"/>
-                    </a:lnT>
-                    <a:lnB cap="flat" cmpd="sng" w="7625">
-                      <a:solidFill>
-                        <a:srgbClr val="000000"/>
-                      </a:solidFill>
-                      <a:prstDash val="solid"/>
-                      <a:round/>
-                      <a:headEnd len="sm" w="sm" type="none"/>
-                      <a:tailEnd len="sm" w="sm" type="none"/>
-                    </a:lnB>
-                  </a:tcPr>
-                </a:tc>
-                <a:tc>
-                  <a:txBody>
-                    <a:bodyPr/>
-                    <a:lstStyle/>
-                    <a:p>
-                      <a:pPr indent="0" lvl="0" marL="0" rtl="0" algn="r">
-                        <a:lnSpc>
-                          <a:spcPct val="115000"/>
-                        </a:lnSpc>
-                        <a:spcBef>
-                          <a:spcPts val="0"/>
-                        </a:spcBef>
-                        <a:spcAft>
-                          <a:spcPts val="0"/>
-                        </a:spcAft>
-                        <a:buNone/>
-                      </a:pPr>
-                      <a:r>
-                        <a:rPr lang="en" sz="1000"/>
-                        <a:t>12.0</a:t>
-                      </a:r>
-                      <a:endParaRPr sz="1000"/>
-                    </a:p>
-                  </a:txBody>
-                  <a:tcPr marT="19050" marB="19050" marR="28575" marL="28575" anchor="b">
-                    <a:lnL cap="flat" cmpd="sng" w="7625">
-                      <a:solidFill>
-                        <a:srgbClr val="000000"/>
-                      </a:solidFill>
-                      <a:prstDash val="solid"/>
-                      <a:round/>
-                      <a:headEnd len="sm" w="sm" type="none"/>
-                      <a:tailEnd len="sm" w="sm" type="none"/>
-                    </a:lnL>
-                    <a:lnR cap="flat" cmpd="sng" w="7625">
-                      <a:solidFill>
-                        <a:srgbClr val="000000"/>
-                      </a:solidFill>
-                      <a:prstDash val="solid"/>
-                      <a:round/>
-                      <a:headEnd len="sm" w="sm" type="none"/>
-                      <a:tailEnd len="sm" w="sm" type="none"/>
-                    </a:lnR>
-                    <a:lnT cap="flat" cmpd="sng" w="7625">
-                      <a:solidFill>
-                        <a:srgbClr val="000000"/>
-                      </a:solidFill>
-                      <a:prstDash val="solid"/>
-                      <a:round/>
-                      <a:headEnd len="sm" w="sm" type="none"/>
-                      <a:tailEnd len="sm" w="sm" type="none"/>
-                    </a:lnT>
-                    <a:lnB cap="flat" cmpd="sng" w="7625">
-                      <a:solidFill>
-                        <a:srgbClr val="000000"/>
-                      </a:solidFill>
-                      <a:prstDash val="solid"/>
-                      <a:round/>
-                      <a:headEnd len="sm" w="sm" type="none"/>
-                      <a:tailEnd len="sm" w="sm" type="none"/>
-                    </a:lnB>
-                  </a:tcPr>
-                </a:tc>
-                <a:tc>
-                  <a:txBody>
-                    <a:bodyPr/>
-                    <a:lstStyle/>
-                    <a:p>
-                      <a:pPr indent="0" lvl="0" marL="0" rtl="0" algn="r">
-                        <a:lnSpc>
-                          <a:spcPct val="115000"/>
-                        </a:lnSpc>
-                        <a:spcBef>
-                          <a:spcPts val="0"/>
-                        </a:spcBef>
-                        <a:spcAft>
-                          <a:spcPts val="0"/>
-                        </a:spcAft>
-                        <a:buNone/>
-                      </a:pPr>
-                      <a:r>
-                        <a:rPr lang="en" sz="1000"/>
-                        <a:t>336.0</a:t>
-                      </a:r>
-                      <a:endParaRPr sz="1000"/>
-                    </a:p>
-                  </a:txBody>
-                  <a:tcPr marT="19050" marB="19050" marR="28575" marL="28575" anchor="b">
-                    <a:lnL cap="flat" cmpd="sng" w="7625">
-                      <a:solidFill>
-                        <a:srgbClr val="000000"/>
-                      </a:solidFill>
-                      <a:prstDash val="solid"/>
-                      <a:round/>
-                      <a:headEnd len="sm" w="sm" type="none"/>
-                      <a:tailEnd len="sm" w="sm" type="none"/>
-                    </a:lnL>
-                    <a:lnR cap="flat" cmpd="sng" w="7625">
-                      <a:solidFill>
-                        <a:srgbClr val="000000"/>
-                      </a:solidFill>
-                      <a:prstDash val="solid"/>
-                      <a:round/>
-                      <a:headEnd len="sm" w="sm" type="none"/>
-                      <a:tailEnd len="sm" w="sm" type="none"/>
-                    </a:lnR>
-                    <a:lnT cap="flat" cmpd="sng" w="7625">
-                      <a:solidFill>
-                        <a:srgbClr val="000000"/>
-                      </a:solidFill>
-                      <a:prstDash val="solid"/>
-                      <a:round/>
-                      <a:headEnd len="sm" w="sm" type="none"/>
-                      <a:tailEnd len="sm" w="sm" type="none"/>
-                    </a:lnT>
-                    <a:lnB cap="flat" cmpd="sng" w="7625">
-                      <a:solidFill>
-                        <a:srgbClr val="000000"/>
-                      </a:solidFill>
-                      <a:prstDash val="solid"/>
-                      <a:round/>
-                      <a:headEnd len="sm" w="sm" type="none"/>
-                      <a:tailEnd len="sm" w="sm" type="none"/>
-                    </a:lnB>
-                  </a:tcPr>
-                </a:tc>
-              </a:tr>
-              <a:tr h="200025">
-                <a:tc>
-                  <a:txBody>
-                    <a:bodyPr/>
-                    <a:lstStyle/>
-                    <a:p>
-                      <a:pPr indent="0" lvl="0" marL="0" rtl="0" algn="l">
-                        <a:lnSpc>
-                          <a:spcPct val="115000"/>
-                        </a:lnSpc>
-                        <a:spcBef>
-                          <a:spcPts val="0"/>
-                        </a:spcBef>
-                        <a:spcAft>
-                          <a:spcPts val="0"/>
-                        </a:spcAft>
-                        <a:buNone/>
-                      </a:pPr>
-                      <a:r>
-                        <a:rPr lang="en" sz="1000"/>
-                        <a:t>C2</a:t>
-                      </a:r>
-                      <a:endParaRPr sz="1000"/>
-                    </a:p>
-                  </a:txBody>
-                  <a:tcPr marT="19050" marB="19050" marR="28575" marL="28575" anchor="b">
-                    <a:lnL cap="flat" cmpd="sng" w="7625">
-                      <a:solidFill>
-                        <a:srgbClr val="000000"/>
-                      </a:solidFill>
-                      <a:prstDash val="solid"/>
-                      <a:round/>
-                      <a:headEnd len="sm" w="sm" type="none"/>
-                      <a:tailEnd len="sm" w="sm" type="none"/>
-                    </a:lnL>
-                    <a:lnR cap="flat" cmpd="sng" w="7625">
-                      <a:solidFill>
-                        <a:srgbClr val="000000"/>
-                      </a:solidFill>
-                      <a:prstDash val="solid"/>
-                      <a:round/>
-                      <a:headEnd len="sm" w="sm" type="none"/>
-                      <a:tailEnd len="sm" w="sm" type="none"/>
-                    </a:lnR>
-                    <a:lnT cap="flat" cmpd="sng" w="7625">
-                      <a:solidFill>
-                        <a:srgbClr val="000000"/>
-                      </a:solidFill>
-                      <a:prstDash val="solid"/>
-                      <a:round/>
-                      <a:headEnd len="sm" w="sm" type="none"/>
-                      <a:tailEnd len="sm" w="sm" type="none"/>
-                    </a:lnT>
-                    <a:lnB cap="flat" cmpd="sng" w="7625">
-                      <a:solidFill>
-                        <a:srgbClr val="000000"/>
-                      </a:solidFill>
-                      <a:prstDash val="solid"/>
-                      <a:round/>
-                      <a:headEnd len="sm" w="sm" type="none"/>
-                      <a:tailEnd len="sm" w="sm" type="none"/>
-                    </a:lnB>
-                  </a:tcPr>
-                </a:tc>
-                <a:tc>
-                  <a:txBody>
-                    <a:bodyPr/>
-                    <a:lstStyle/>
-                    <a:p>
-                      <a:pPr indent="0" lvl="0" marL="0" rtl="0" algn="l">
-                        <a:lnSpc>
-                          <a:spcPct val="115000"/>
-                        </a:lnSpc>
-                        <a:spcBef>
-                          <a:spcPts val="0"/>
-                        </a:spcBef>
-                        <a:spcAft>
-                          <a:spcPts val="0"/>
-                        </a:spcAft>
-                        <a:buNone/>
-                      </a:pPr>
-                      <a:r>
-                        <a:rPr lang="en" sz="1000"/>
-                        <a:t>Long Polling</a:t>
-                      </a:r>
-                      <a:endParaRPr sz="1000"/>
-                    </a:p>
-                  </a:txBody>
-                  <a:tcPr marT="19050" marB="19050" marR="28575" marL="28575" anchor="b">
-                    <a:lnL cap="flat" cmpd="sng" w="7625">
-                      <a:solidFill>
-                        <a:srgbClr val="000000"/>
-                      </a:solidFill>
-                      <a:prstDash val="solid"/>
-                      <a:round/>
-                      <a:headEnd len="sm" w="sm" type="none"/>
-                      <a:tailEnd len="sm" w="sm" type="none"/>
-                    </a:lnL>
-                    <a:lnR cap="flat" cmpd="sng" w="7625">
-                      <a:solidFill>
-                        <a:srgbClr val="000000"/>
-                      </a:solidFill>
-                      <a:prstDash val="solid"/>
-                      <a:round/>
-                      <a:headEnd len="sm" w="sm" type="none"/>
-                      <a:tailEnd len="sm" w="sm" type="none"/>
-                    </a:lnR>
-                    <a:lnT cap="flat" cmpd="sng" w="7625">
-                      <a:solidFill>
-                        <a:srgbClr val="000000"/>
-                      </a:solidFill>
-                      <a:prstDash val="solid"/>
-                      <a:round/>
-                      <a:headEnd len="sm" w="sm" type="none"/>
-                      <a:tailEnd len="sm" w="sm" type="none"/>
-                    </a:lnT>
-                    <a:lnB cap="flat" cmpd="sng" w="7625">
-                      <a:solidFill>
-                        <a:srgbClr val="000000"/>
-                      </a:solidFill>
-                      <a:prstDash val="solid"/>
-                      <a:round/>
-                      <a:headEnd len="sm" w="sm" type="none"/>
-                      <a:tailEnd len="sm" w="sm" type="none"/>
-                    </a:lnB>
-                  </a:tcPr>
-                </a:tc>
-                <a:tc>
-                  <a:txBody>
-                    <a:bodyPr/>
-                    <a:lstStyle/>
-                    <a:p>
-                      <a:pPr indent="0" lvl="0" marL="0" rtl="0" algn="r">
-                        <a:lnSpc>
-                          <a:spcPct val="115000"/>
-                        </a:lnSpc>
-                        <a:spcBef>
-                          <a:spcPts val="0"/>
-                        </a:spcBef>
-                        <a:spcAft>
-                          <a:spcPts val="0"/>
-                        </a:spcAft>
-                        <a:buNone/>
-                      </a:pPr>
-                      <a:r>
-                        <a:rPr lang="en" sz="1000"/>
-                        <a:t>53.0</a:t>
-                      </a:r>
-                      <a:endParaRPr sz="1000"/>
-                    </a:p>
-                  </a:txBody>
-                  <a:tcPr marT="19050" marB="19050" marR="28575" marL="28575" anchor="b">
-                    <a:lnL cap="flat" cmpd="sng" w="7625">
-                      <a:solidFill>
-                        <a:srgbClr val="000000"/>
-                      </a:solidFill>
-                      <a:prstDash val="solid"/>
-                      <a:round/>
-                      <a:headEnd len="sm" w="sm" type="none"/>
-                      <a:tailEnd len="sm" w="sm" type="none"/>
-                    </a:lnL>
-                    <a:lnR cap="flat" cmpd="sng" w="7625">
-                      <a:solidFill>
-                        <a:srgbClr val="000000"/>
-                      </a:solidFill>
-                      <a:prstDash val="solid"/>
-                      <a:round/>
-                      <a:headEnd len="sm" w="sm" type="none"/>
-                      <a:tailEnd len="sm" w="sm" type="none"/>
-                    </a:lnR>
-                    <a:lnT cap="flat" cmpd="sng" w="7625">
-                      <a:solidFill>
-                        <a:srgbClr val="000000"/>
-                      </a:solidFill>
-                      <a:prstDash val="solid"/>
-                      <a:round/>
-                      <a:headEnd len="sm" w="sm" type="none"/>
-                      <a:tailEnd len="sm" w="sm" type="none"/>
-                    </a:lnT>
-                    <a:lnB cap="flat" cmpd="sng" w="7625">
-                      <a:solidFill>
-                        <a:srgbClr val="000000"/>
-                      </a:solidFill>
-                      <a:prstDash val="solid"/>
-                      <a:round/>
-                      <a:headEnd len="sm" w="sm" type="none"/>
-                      <a:tailEnd len="sm" w="sm" type="none"/>
-                    </a:lnB>
-                  </a:tcPr>
-                </a:tc>
-                <a:tc>
-                  <a:txBody>
-                    <a:bodyPr/>
-                    <a:lstStyle/>
-                    <a:p>
-                      <a:pPr indent="0" lvl="0" marL="0" rtl="0" algn="r">
-                        <a:lnSpc>
-                          <a:spcPct val="115000"/>
-                        </a:lnSpc>
-                        <a:spcBef>
-                          <a:spcPts val="0"/>
-                        </a:spcBef>
-                        <a:spcAft>
-                          <a:spcPts val="0"/>
-                        </a:spcAft>
-                        <a:buNone/>
-                      </a:pPr>
-                      <a:r>
-                        <a:rPr lang="en" sz="1000"/>
-                        <a:t>54.0</a:t>
-                      </a:r>
-                      <a:endParaRPr sz="1000"/>
-                    </a:p>
-                  </a:txBody>
-                  <a:tcPr marT="19050" marB="19050" marR="28575" marL="28575" anchor="b">
-                    <a:lnL cap="flat" cmpd="sng" w="7625">
-                      <a:solidFill>
-                        <a:srgbClr val="000000"/>
-                      </a:solidFill>
-                      <a:prstDash val="solid"/>
-                      <a:round/>
-                      <a:headEnd len="sm" w="sm" type="none"/>
-                      <a:tailEnd len="sm" w="sm" type="none"/>
-                    </a:lnL>
-                    <a:lnR cap="flat" cmpd="sng" w="7625">
-                      <a:solidFill>
-                        <a:srgbClr val="000000"/>
-                      </a:solidFill>
-                      <a:prstDash val="solid"/>
-                      <a:round/>
-                      <a:headEnd len="sm" w="sm" type="none"/>
-                      <a:tailEnd len="sm" w="sm" type="none"/>
-                    </a:lnR>
-                    <a:lnT cap="flat" cmpd="sng" w="7625">
-                      <a:solidFill>
-                        <a:srgbClr val="000000"/>
-                      </a:solidFill>
-                      <a:prstDash val="solid"/>
-                      <a:round/>
-                      <a:headEnd len="sm" w="sm" type="none"/>
-                      <a:tailEnd len="sm" w="sm" type="none"/>
-                    </a:lnT>
-                    <a:lnB cap="flat" cmpd="sng" w="7625">
-                      <a:solidFill>
-                        <a:srgbClr val="000000"/>
-                      </a:solidFill>
-                      <a:prstDash val="solid"/>
-                      <a:round/>
-                      <a:headEnd len="sm" w="sm" type="none"/>
-                      <a:tailEnd len="sm" w="sm" type="none"/>
-                    </a:lnB>
-                  </a:tcPr>
-                </a:tc>
-                <a:tc>
-                  <a:txBody>
-                    <a:bodyPr/>
-                    <a:lstStyle/>
-                    <a:p>
-                      <a:pPr indent="0" lvl="0" marL="0" rtl="0" algn="r">
-                        <a:lnSpc>
-                          <a:spcPct val="115000"/>
-                        </a:lnSpc>
-                        <a:spcBef>
-                          <a:spcPts val="0"/>
-                        </a:spcBef>
-                        <a:spcAft>
-                          <a:spcPts val="0"/>
-                        </a:spcAft>
-                        <a:buNone/>
-                      </a:pPr>
-                      <a:r>
-                        <a:rPr lang="en" sz="1000"/>
-                        <a:t>53.7</a:t>
-                      </a:r>
-                      <a:endParaRPr sz="1000"/>
-                    </a:p>
-                  </a:txBody>
-                  <a:tcPr marT="19050" marB="19050" marR="28575" marL="28575" anchor="b">
-                    <a:lnL cap="flat" cmpd="sng" w="7625">
-                      <a:solidFill>
-                        <a:srgbClr val="000000"/>
-                      </a:solidFill>
-                      <a:prstDash val="solid"/>
-                      <a:round/>
-                      <a:headEnd len="sm" w="sm" type="none"/>
-                      <a:tailEnd len="sm" w="sm" type="none"/>
-                    </a:lnL>
-                    <a:lnR cap="flat" cmpd="sng" w="7625">
-                      <a:solidFill>
-                        <a:srgbClr val="000000"/>
-                      </a:solidFill>
-                      <a:prstDash val="solid"/>
-                      <a:round/>
-                      <a:headEnd len="sm" w="sm" type="none"/>
-                      <a:tailEnd len="sm" w="sm" type="none"/>
-                    </a:lnR>
-                    <a:lnT cap="flat" cmpd="sng" w="7625">
-                      <a:solidFill>
-                        <a:srgbClr val="000000"/>
-                      </a:solidFill>
-                      <a:prstDash val="solid"/>
-                      <a:round/>
-                      <a:headEnd len="sm" w="sm" type="none"/>
-                      <a:tailEnd len="sm" w="sm" type="none"/>
-                    </a:lnT>
-                    <a:lnB cap="flat" cmpd="sng" w="7625">
-                      <a:solidFill>
-                        <a:srgbClr val="000000"/>
-                      </a:solidFill>
-                      <a:prstDash val="solid"/>
-                      <a:round/>
-                      <a:headEnd len="sm" w="sm" type="none"/>
-                      <a:tailEnd len="sm" w="sm" type="none"/>
-                    </a:lnB>
-                  </a:tcPr>
-                </a:tc>
-                <a:tc>
-                  <a:txBody>
-                    <a:bodyPr/>
-                    <a:lstStyle/>
-                    <a:p>
-                      <a:pPr indent="0" lvl="0" marL="0" rtl="0" algn="r">
-                        <a:lnSpc>
-                          <a:spcPct val="115000"/>
-                        </a:lnSpc>
-                        <a:spcBef>
-                          <a:spcPts val="0"/>
-                        </a:spcBef>
-                        <a:spcAft>
-                          <a:spcPts val="0"/>
-                        </a:spcAft>
-                        <a:buNone/>
-                      </a:pPr>
-                      <a:r>
-                        <a:rPr lang="en" sz="1000"/>
-                        <a:t>108.7</a:t>
-                      </a:r>
-                      <a:endParaRPr sz="1000"/>
-                    </a:p>
-                  </a:txBody>
-                  <a:tcPr marT="19050" marB="19050" marR="28575" marL="28575" anchor="b">
-                    <a:lnL cap="flat" cmpd="sng" w="7625">
-                      <a:solidFill>
-                        <a:srgbClr val="000000"/>
-                      </a:solidFill>
-                      <a:prstDash val="solid"/>
-                      <a:round/>
-                      <a:headEnd len="sm" w="sm" type="none"/>
-                      <a:tailEnd len="sm" w="sm" type="none"/>
-                    </a:lnL>
-                    <a:lnR cap="flat" cmpd="sng" w="7625">
-                      <a:solidFill>
-                        <a:srgbClr val="000000"/>
-                      </a:solidFill>
-                      <a:prstDash val="solid"/>
-                      <a:round/>
-                      <a:headEnd len="sm" w="sm" type="none"/>
-                      <a:tailEnd len="sm" w="sm" type="none"/>
-                    </a:lnR>
-                    <a:lnT cap="flat" cmpd="sng" w="7625">
-                      <a:solidFill>
-                        <a:srgbClr val="000000"/>
-                      </a:solidFill>
-                      <a:prstDash val="solid"/>
-                      <a:round/>
-                      <a:headEnd len="sm" w="sm" type="none"/>
-                      <a:tailEnd len="sm" w="sm" type="none"/>
-                    </a:lnT>
-                    <a:lnB cap="flat" cmpd="sng" w="7625">
-                      <a:solidFill>
-                        <a:srgbClr val="000000"/>
-                      </a:solidFill>
-                      <a:prstDash val="solid"/>
-                      <a:round/>
-                      <a:headEnd len="sm" w="sm" type="none"/>
-                      <a:tailEnd len="sm" w="sm" type="none"/>
-                    </a:lnB>
-                  </a:tcPr>
-                </a:tc>
-              </a:tr>
-              <a:tr h="200025">
-                <a:tc>
-                  <a:txBody>
-                    <a:bodyPr/>
-                    <a:lstStyle/>
-                    <a:p>
-                      <a:pPr indent="0" lvl="0" marL="0" rtl="0" algn="l">
-                        <a:lnSpc>
-                          <a:spcPct val="115000"/>
-                        </a:lnSpc>
-                        <a:spcBef>
-                          <a:spcPts val="0"/>
-                        </a:spcBef>
-                        <a:spcAft>
-                          <a:spcPts val="0"/>
-                        </a:spcAft>
-                        <a:buNone/>
-                      </a:pPr>
-                      <a:r>
-                        <a:rPr lang="en" sz="1000"/>
-                        <a:t>C3</a:t>
-                      </a:r>
-                      <a:endParaRPr sz="1000"/>
-                    </a:p>
-                  </a:txBody>
-                  <a:tcPr marT="19050" marB="19050" marR="28575" marL="28575" anchor="b">
-                    <a:lnL cap="flat" cmpd="sng" w="7625">
-                      <a:solidFill>
-                        <a:srgbClr val="000000"/>
-                      </a:solidFill>
-                      <a:prstDash val="solid"/>
-                      <a:round/>
-                      <a:headEnd len="sm" w="sm" type="none"/>
-                      <a:tailEnd len="sm" w="sm" type="none"/>
-                    </a:lnL>
-                    <a:lnR cap="flat" cmpd="sng" w="7625">
-                      <a:solidFill>
-                        <a:srgbClr val="000000"/>
-                      </a:solidFill>
-                      <a:prstDash val="solid"/>
-                      <a:round/>
-                      <a:headEnd len="sm" w="sm" type="none"/>
-                      <a:tailEnd len="sm" w="sm" type="none"/>
-                    </a:lnR>
-                    <a:lnT cap="flat" cmpd="sng" w="7625">
-                      <a:solidFill>
-                        <a:srgbClr val="000000"/>
-                      </a:solidFill>
-                      <a:prstDash val="solid"/>
-                      <a:round/>
-                      <a:headEnd len="sm" w="sm" type="none"/>
-                      <a:tailEnd len="sm" w="sm" type="none"/>
-                    </a:lnT>
-                    <a:lnB cap="flat" cmpd="sng" w="7625">
-                      <a:solidFill>
-                        <a:srgbClr val="000000"/>
-                      </a:solidFill>
-                      <a:prstDash val="solid"/>
-                      <a:round/>
-                      <a:headEnd len="sm" w="sm" type="none"/>
-                      <a:tailEnd len="sm" w="sm" type="none"/>
-                    </a:lnB>
-                  </a:tcPr>
-                </a:tc>
-                <a:tc>
-                  <a:txBody>
-                    <a:bodyPr/>
-                    <a:lstStyle/>
-                    <a:p>
-                      <a:pPr indent="0" lvl="0" marL="0" rtl="0" algn="l">
-                        <a:lnSpc>
-                          <a:spcPct val="115000"/>
-                        </a:lnSpc>
-                        <a:spcBef>
-                          <a:spcPts val="0"/>
-                        </a:spcBef>
-                        <a:spcAft>
-                          <a:spcPts val="0"/>
-                        </a:spcAft>
-                        <a:buNone/>
-                      </a:pPr>
-                      <a:r>
-                        <a:rPr lang="en" sz="1000"/>
-                        <a:t>Short Polling</a:t>
-                      </a:r>
-                      <a:endParaRPr sz="1000"/>
-                    </a:p>
-                  </a:txBody>
-                  <a:tcPr marT="19050" marB="19050" marR="28575" marL="28575" anchor="b">
-                    <a:lnL cap="flat" cmpd="sng" w="7625">
-                      <a:solidFill>
-                        <a:srgbClr val="000000"/>
-                      </a:solidFill>
-                      <a:prstDash val="solid"/>
-                      <a:round/>
-                      <a:headEnd len="sm" w="sm" type="none"/>
-                      <a:tailEnd len="sm" w="sm" type="none"/>
-                    </a:lnL>
-                    <a:lnR cap="flat" cmpd="sng" w="7625">
-                      <a:solidFill>
-                        <a:srgbClr val="000000"/>
-                      </a:solidFill>
-                      <a:prstDash val="solid"/>
-                      <a:round/>
-                      <a:headEnd len="sm" w="sm" type="none"/>
-                      <a:tailEnd len="sm" w="sm" type="none"/>
-                    </a:lnR>
-                    <a:lnT cap="flat" cmpd="sng" w="7625">
-                      <a:solidFill>
-                        <a:srgbClr val="000000"/>
-                      </a:solidFill>
-                      <a:prstDash val="solid"/>
-                      <a:round/>
-                      <a:headEnd len="sm" w="sm" type="none"/>
-                      <a:tailEnd len="sm" w="sm" type="none"/>
-                    </a:lnT>
-                    <a:lnB cap="flat" cmpd="sng" w="7625">
-                      <a:solidFill>
-                        <a:srgbClr val="000000"/>
-                      </a:solidFill>
-                      <a:prstDash val="solid"/>
-                      <a:round/>
-                      <a:headEnd len="sm" w="sm" type="none"/>
-                      <a:tailEnd len="sm" w="sm" type="none"/>
-                    </a:lnB>
-                  </a:tcPr>
-                </a:tc>
-                <a:tc>
-                  <a:txBody>
-                    <a:bodyPr/>
-                    <a:lstStyle/>
-                    <a:p>
-                      <a:pPr indent="0" lvl="0" marL="0" rtl="0" algn="r">
-                        <a:lnSpc>
-                          <a:spcPct val="115000"/>
-                        </a:lnSpc>
-                        <a:spcBef>
-                          <a:spcPts val="0"/>
-                        </a:spcBef>
-                        <a:spcAft>
-                          <a:spcPts val="0"/>
-                        </a:spcAft>
-                        <a:buNone/>
-                      </a:pPr>
-                      <a:r>
-                        <a:rPr lang="en" sz="1000"/>
-                        <a:t>12.0</a:t>
-                      </a:r>
-                      <a:endParaRPr sz="1000"/>
-                    </a:p>
-                  </a:txBody>
-                  <a:tcPr marT="19050" marB="19050" marR="28575" marL="28575" anchor="b">
-                    <a:lnL cap="flat" cmpd="sng" w="7625">
-                      <a:solidFill>
-                        <a:srgbClr val="000000"/>
-                      </a:solidFill>
-                      <a:prstDash val="solid"/>
-                      <a:round/>
-                      <a:headEnd len="sm" w="sm" type="none"/>
-                      <a:tailEnd len="sm" w="sm" type="none"/>
-                    </a:lnL>
-                    <a:lnR cap="flat" cmpd="sng" w="7625">
-                      <a:solidFill>
-                        <a:srgbClr val="000000"/>
-                      </a:solidFill>
-                      <a:prstDash val="solid"/>
-                      <a:round/>
-                      <a:headEnd len="sm" w="sm" type="none"/>
-                      <a:tailEnd len="sm" w="sm" type="none"/>
-                    </a:lnR>
-                    <a:lnT cap="flat" cmpd="sng" w="7625">
-                      <a:solidFill>
-                        <a:srgbClr val="000000"/>
-                      </a:solidFill>
-                      <a:prstDash val="solid"/>
-                      <a:round/>
-                      <a:headEnd len="sm" w="sm" type="none"/>
-                      <a:tailEnd len="sm" w="sm" type="none"/>
-                    </a:lnT>
-                    <a:lnB cap="flat" cmpd="sng" w="7625">
-                      <a:solidFill>
-                        <a:srgbClr val="000000"/>
-                      </a:solidFill>
-                      <a:prstDash val="solid"/>
-                      <a:round/>
-                      <a:headEnd len="sm" w="sm" type="none"/>
-                      <a:tailEnd len="sm" w="sm" type="none"/>
-                    </a:lnB>
-                  </a:tcPr>
-                </a:tc>
-                <a:tc>
-                  <a:txBody>
-                    <a:bodyPr/>
-                    <a:lstStyle/>
-                    <a:p>
-                      <a:pPr indent="0" lvl="0" marL="0" rtl="0" algn="r">
-                        <a:lnSpc>
-                          <a:spcPct val="115000"/>
-                        </a:lnSpc>
-                        <a:spcBef>
-                          <a:spcPts val="0"/>
-                        </a:spcBef>
-                        <a:spcAft>
-                          <a:spcPts val="0"/>
-                        </a:spcAft>
-                        <a:buNone/>
-                      </a:pPr>
-                      <a:r>
-                        <a:rPr lang="en" sz="1000"/>
-                        <a:t>12.0</a:t>
-                      </a:r>
-                      <a:endParaRPr sz="1000"/>
-                    </a:p>
-                  </a:txBody>
-                  <a:tcPr marT="19050" marB="19050" marR="28575" marL="28575" anchor="b">
-                    <a:lnL cap="flat" cmpd="sng" w="7625">
-                      <a:solidFill>
-                        <a:srgbClr val="000000"/>
-                      </a:solidFill>
-                      <a:prstDash val="solid"/>
-                      <a:round/>
-                      <a:headEnd len="sm" w="sm" type="none"/>
-                      <a:tailEnd len="sm" w="sm" type="none"/>
-                    </a:lnL>
-                    <a:lnR cap="flat" cmpd="sng" w="7625">
-                      <a:solidFill>
-                        <a:srgbClr val="000000"/>
-                      </a:solidFill>
-                      <a:prstDash val="solid"/>
-                      <a:round/>
-                      <a:headEnd len="sm" w="sm" type="none"/>
-                      <a:tailEnd len="sm" w="sm" type="none"/>
-                    </a:lnR>
-                    <a:lnT cap="flat" cmpd="sng" w="7625">
-                      <a:solidFill>
-                        <a:srgbClr val="000000"/>
-                      </a:solidFill>
-                      <a:prstDash val="solid"/>
-                      <a:round/>
-                      <a:headEnd len="sm" w="sm" type="none"/>
-                      <a:tailEnd len="sm" w="sm" type="none"/>
-                    </a:lnT>
-                    <a:lnB cap="flat" cmpd="sng" w="7625">
-                      <a:solidFill>
-                        <a:srgbClr val="000000"/>
-                      </a:solidFill>
-                      <a:prstDash val="solid"/>
-                      <a:round/>
-                      <a:headEnd len="sm" w="sm" type="none"/>
-                      <a:tailEnd len="sm" w="sm" type="none"/>
-                    </a:lnB>
-                  </a:tcPr>
-                </a:tc>
-                <a:tc>
-                  <a:txBody>
-                    <a:bodyPr/>
-                    <a:lstStyle/>
-                    <a:p>
-                      <a:pPr indent="0" lvl="0" marL="0" rtl="0" algn="r">
-                        <a:lnSpc>
-                          <a:spcPct val="115000"/>
-                        </a:lnSpc>
-                        <a:spcBef>
-                          <a:spcPts val="0"/>
-                        </a:spcBef>
-                        <a:spcAft>
-                          <a:spcPts val="0"/>
-                        </a:spcAft>
-                        <a:buNone/>
-                      </a:pPr>
-                      <a:r>
-                        <a:rPr lang="en" sz="1000"/>
-                        <a:t>12.0</a:t>
-                      </a:r>
-                      <a:endParaRPr sz="1000"/>
-                    </a:p>
-                  </a:txBody>
-                  <a:tcPr marT="19050" marB="19050" marR="28575" marL="28575" anchor="b">
-                    <a:lnL cap="flat" cmpd="sng" w="7625">
-                      <a:solidFill>
-                        <a:srgbClr val="000000"/>
-                      </a:solidFill>
-                      <a:prstDash val="solid"/>
-                      <a:round/>
-                      <a:headEnd len="sm" w="sm" type="none"/>
-                      <a:tailEnd len="sm" w="sm" type="none"/>
-                    </a:lnL>
-                    <a:lnR cap="flat" cmpd="sng" w="7625">
-                      <a:solidFill>
-                        <a:srgbClr val="000000"/>
-                      </a:solidFill>
-                      <a:prstDash val="solid"/>
-                      <a:round/>
-                      <a:headEnd len="sm" w="sm" type="none"/>
-                      <a:tailEnd len="sm" w="sm" type="none"/>
-                    </a:lnR>
-                    <a:lnT cap="flat" cmpd="sng" w="7625">
-                      <a:solidFill>
-                        <a:srgbClr val="000000"/>
-                      </a:solidFill>
-                      <a:prstDash val="solid"/>
-                      <a:round/>
-                      <a:headEnd len="sm" w="sm" type="none"/>
-                      <a:tailEnd len="sm" w="sm" type="none"/>
-                    </a:lnT>
-                    <a:lnB cap="flat" cmpd="sng" w="7625">
-                      <a:solidFill>
-                        <a:srgbClr val="000000"/>
-                      </a:solidFill>
-                      <a:prstDash val="solid"/>
-                      <a:round/>
-                      <a:headEnd len="sm" w="sm" type="none"/>
-                      <a:tailEnd len="sm" w="sm" type="none"/>
-                    </a:lnB>
-                  </a:tcPr>
-                </a:tc>
-                <a:tc>
-                  <a:txBody>
-                    <a:bodyPr/>
-                    <a:lstStyle/>
-                    <a:p>
-                      <a:pPr indent="0" lvl="0" marL="0" rtl="0" algn="r">
-                        <a:lnSpc>
-                          <a:spcPct val="115000"/>
-                        </a:lnSpc>
-                        <a:spcBef>
-                          <a:spcPts val="0"/>
-                        </a:spcBef>
-                        <a:spcAft>
-                          <a:spcPts val="0"/>
-                        </a:spcAft>
-                        <a:buNone/>
-                      </a:pPr>
-                      <a:r>
-                        <a:rPr lang="en" sz="1000"/>
-                        <a:t>729.7</a:t>
-                      </a:r>
-                      <a:endParaRPr sz="1000"/>
-                    </a:p>
-                  </a:txBody>
-                  <a:tcPr marT="19050" marB="19050" marR="28575" marL="28575" anchor="b">
-                    <a:lnL cap="flat" cmpd="sng" w="7625">
-                      <a:solidFill>
-                        <a:srgbClr val="000000"/>
-                      </a:solidFill>
-                      <a:prstDash val="solid"/>
-                      <a:round/>
-                      <a:headEnd len="sm" w="sm" type="none"/>
-                      <a:tailEnd len="sm" w="sm" type="none"/>
-                    </a:lnL>
-                    <a:lnR cap="flat" cmpd="sng" w="7625">
-                      <a:solidFill>
-                        <a:srgbClr val="000000"/>
-                      </a:solidFill>
-                      <a:prstDash val="solid"/>
-                      <a:round/>
-                      <a:headEnd len="sm" w="sm" type="none"/>
-                      <a:tailEnd len="sm" w="sm" type="none"/>
-                    </a:lnR>
-                    <a:lnT cap="flat" cmpd="sng" w="7625">
-                      <a:solidFill>
-                        <a:srgbClr val="000000"/>
-                      </a:solidFill>
-                      <a:prstDash val="solid"/>
-                      <a:round/>
-                      <a:headEnd len="sm" w="sm" type="none"/>
-                      <a:tailEnd len="sm" w="sm" type="none"/>
-                    </a:lnT>
-                    <a:lnB cap="flat" cmpd="sng" w="7625">
-                      <a:solidFill>
-                        <a:srgbClr val="000000"/>
-                      </a:solidFill>
-                      <a:prstDash val="solid"/>
-                      <a:round/>
-                      <a:headEnd len="sm" w="sm" type="none"/>
-                      <a:tailEnd len="sm" w="sm" type="none"/>
-                    </a:lnB>
-                  </a:tcPr>
-                </a:tc>
-              </a:tr>
-              <a:tr h="200025">
-                <a:tc>
-                  <a:txBody>
-                    <a:bodyPr/>
-                    <a:lstStyle/>
-                    <a:p>
-                      <a:pPr indent="0" lvl="0" marL="0" rtl="0" algn="l">
-                        <a:lnSpc>
-                          <a:spcPct val="115000"/>
-                        </a:lnSpc>
-                        <a:spcBef>
-                          <a:spcPts val="0"/>
-                        </a:spcBef>
-                        <a:spcAft>
-                          <a:spcPts val="0"/>
-                        </a:spcAft>
-                        <a:buNone/>
-                      </a:pPr>
-                      <a:r>
-                        <a:rPr lang="en" sz="1000"/>
-                        <a:t>C3</a:t>
-                      </a:r>
-                      <a:endParaRPr sz="1000"/>
-                    </a:p>
-                  </a:txBody>
-                  <a:tcPr marT="19050" marB="19050" marR="28575" marL="28575" anchor="b">
-                    <a:lnL cap="flat" cmpd="sng" w="7625">
-                      <a:solidFill>
-                        <a:srgbClr val="000000"/>
-                      </a:solidFill>
-                      <a:prstDash val="solid"/>
-                      <a:round/>
-                      <a:headEnd len="sm" w="sm" type="none"/>
-                      <a:tailEnd len="sm" w="sm" type="none"/>
-                    </a:lnL>
-                    <a:lnR cap="flat" cmpd="sng" w="7625">
-                      <a:solidFill>
-                        <a:srgbClr val="000000"/>
-                      </a:solidFill>
-                      <a:prstDash val="solid"/>
-                      <a:round/>
-                      <a:headEnd len="sm" w="sm" type="none"/>
-                      <a:tailEnd len="sm" w="sm" type="none"/>
-                    </a:lnR>
-                    <a:lnT cap="flat" cmpd="sng" w="7625">
-                      <a:solidFill>
-                        <a:srgbClr val="000000"/>
-                      </a:solidFill>
-                      <a:prstDash val="solid"/>
-                      <a:round/>
-                      <a:headEnd len="sm" w="sm" type="none"/>
-                      <a:tailEnd len="sm" w="sm" type="none"/>
-                    </a:lnT>
-                    <a:lnB cap="flat" cmpd="sng" w="7625">
-                      <a:solidFill>
-                        <a:srgbClr val="000000"/>
-                      </a:solidFill>
-                      <a:prstDash val="solid"/>
-                      <a:round/>
-                      <a:headEnd len="sm" w="sm" type="none"/>
-                      <a:tailEnd len="sm" w="sm" type="none"/>
-                    </a:lnB>
-                  </a:tcPr>
-                </a:tc>
-                <a:tc>
-                  <a:txBody>
-                    <a:bodyPr/>
-                    <a:lstStyle/>
-                    <a:p>
-                      <a:pPr indent="0" lvl="0" marL="0" rtl="0" algn="l">
-                        <a:lnSpc>
-                          <a:spcPct val="115000"/>
-                        </a:lnSpc>
-                        <a:spcBef>
-                          <a:spcPts val="0"/>
-                        </a:spcBef>
-                        <a:spcAft>
-                          <a:spcPts val="0"/>
-                        </a:spcAft>
-                        <a:buNone/>
-                      </a:pPr>
-                      <a:r>
-                        <a:rPr lang="en" sz="1000"/>
-                        <a:t>Long Polling</a:t>
-                      </a:r>
-                      <a:endParaRPr sz="1000"/>
-                    </a:p>
-                  </a:txBody>
-                  <a:tcPr marT="19050" marB="19050" marR="28575" marL="28575" anchor="b">
-                    <a:lnL cap="flat" cmpd="sng" w="7625">
-                      <a:solidFill>
-                        <a:srgbClr val="000000"/>
-                      </a:solidFill>
-                      <a:prstDash val="solid"/>
-                      <a:round/>
-                      <a:headEnd len="sm" w="sm" type="none"/>
-                      <a:tailEnd len="sm" w="sm" type="none"/>
-                    </a:lnL>
-                    <a:lnR cap="flat" cmpd="sng" w="7625">
-                      <a:solidFill>
-                        <a:srgbClr val="000000"/>
-                      </a:solidFill>
-                      <a:prstDash val="solid"/>
-                      <a:round/>
-                      <a:headEnd len="sm" w="sm" type="none"/>
-                      <a:tailEnd len="sm" w="sm" type="none"/>
-                    </a:lnR>
-                    <a:lnT cap="flat" cmpd="sng" w="7625">
-                      <a:solidFill>
-                        <a:srgbClr val="000000"/>
-                      </a:solidFill>
-                      <a:prstDash val="solid"/>
-                      <a:round/>
-                      <a:headEnd len="sm" w="sm" type="none"/>
-                      <a:tailEnd len="sm" w="sm" type="none"/>
-                    </a:lnT>
-                    <a:lnB cap="flat" cmpd="sng" w="7625">
-                      <a:solidFill>
-                        <a:srgbClr val="000000"/>
-                      </a:solidFill>
-                      <a:prstDash val="solid"/>
-                      <a:round/>
-                      <a:headEnd len="sm" w="sm" type="none"/>
-                      <a:tailEnd len="sm" w="sm" type="none"/>
-                    </a:lnB>
-                  </a:tcPr>
-                </a:tc>
-                <a:tc>
-                  <a:txBody>
-                    <a:bodyPr/>
-                    <a:lstStyle/>
-                    <a:p>
-                      <a:pPr indent="0" lvl="0" marL="0" rtl="0" algn="r">
-                        <a:lnSpc>
-                          <a:spcPct val="115000"/>
-                        </a:lnSpc>
-                        <a:spcBef>
-                          <a:spcPts val="0"/>
-                        </a:spcBef>
-                        <a:spcAft>
-                          <a:spcPts val="0"/>
-                        </a:spcAft>
-                        <a:buNone/>
-                      </a:pPr>
-                      <a:r>
-                        <a:rPr lang="en" sz="1000"/>
-                        <a:t>53.0</a:t>
-                      </a:r>
-                      <a:endParaRPr sz="1000"/>
-                    </a:p>
-                  </a:txBody>
-                  <a:tcPr marT="19050" marB="19050" marR="28575" marL="28575" anchor="b">
-                    <a:lnL cap="flat" cmpd="sng" w="7625">
-                      <a:solidFill>
-                        <a:srgbClr val="000000"/>
-                      </a:solidFill>
-                      <a:prstDash val="solid"/>
-                      <a:round/>
-                      <a:headEnd len="sm" w="sm" type="none"/>
-                      <a:tailEnd len="sm" w="sm" type="none"/>
-                    </a:lnL>
-                    <a:lnR cap="flat" cmpd="sng" w="7625">
-                      <a:solidFill>
-                        <a:srgbClr val="000000"/>
-                      </a:solidFill>
-                      <a:prstDash val="solid"/>
-                      <a:round/>
-                      <a:headEnd len="sm" w="sm" type="none"/>
-                      <a:tailEnd len="sm" w="sm" type="none"/>
-                    </a:lnR>
-                    <a:lnT cap="flat" cmpd="sng" w="7625">
-                      <a:solidFill>
-                        <a:srgbClr val="000000"/>
-                      </a:solidFill>
-                      <a:prstDash val="solid"/>
-                      <a:round/>
-                      <a:headEnd len="sm" w="sm" type="none"/>
-                      <a:tailEnd len="sm" w="sm" type="none"/>
-                    </a:lnT>
-                    <a:lnB cap="flat" cmpd="sng" w="7625">
-                      <a:solidFill>
-                        <a:srgbClr val="000000"/>
-                      </a:solidFill>
-                      <a:prstDash val="solid"/>
-                      <a:round/>
-                      <a:headEnd len="sm" w="sm" type="none"/>
-                      <a:tailEnd len="sm" w="sm" type="none"/>
-                    </a:lnB>
-                  </a:tcPr>
-                </a:tc>
-                <a:tc>
-                  <a:txBody>
-                    <a:bodyPr/>
-                    <a:lstStyle/>
-                    <a:p>
-                      <a:pPr indent="0" lvl="0" marL="0" rtl="0" algn="r">
-                        <a:lnSpc>
-                          <a:spcPct val="115000"/>
-                        </a:lnSpc>
-                        <a:spcBef>
-                          <a:spcPts val="0"/>
-                        </a:spcBef>
-                        <a:spcAft>
-                          <a:spcPts val="0"/>
-                        </a:spcAft>
-                        <a:buNone/>
-                      </a:pPr>
-                      <a:r>
-                        <a:rPr lang="en" sz="1000"/>
-                        <a:t>54.0</a:t>
-                      </a:r>
-                      <a:endParaRPr sz="1000"/>
-                    </a:p>
-                  </a:txBody>
-                  <a:tcPr marT="19050" marB="19050" marR="28575" marL="28575" anchor="b">
-                    <a:lnL cap="flat" cmpd="sng" w="7625">
-                      <a:solidFill>
-                        <a:srgbClr val="000000"/>
-                      </a:solidFill>
-                      <a:prstDash val="solid"/>
-                      <a:round/>
-                      <a:headEnd len="sm" w="sm" type="none"/>
-                      <a:tailEnd len="sm" w="sm" type="none"/>
-                    </a:lnL>
-                    <a:lnR cap="flat" cmpd="sng" w="7625">
-                      <a:solidFill>
-                        <a:srgbClr val="000000"/>
-                      </a:solidFill>
-                      <a:prstDash val="solid"/>
-                      <a:round/>
-                      <a:headEnd len="sm" w="sm" type="none"/>
-                      <a:tailEnd len="sm" w="sm" type="none"/>
-                    </a:lnR>
-                    <a:lnT cap="flat" cmpd="sng" w="7625">
-                      <a:solidFill>
-                        <a:srgbClr val="000000"/>
-                      </a:solidFill>
-                      <a:prstDash val="solid"/>
-                      <a:round/>
-                      <a:headEnd len="sm" w="sm" type="none"/>
-                      <a:tailEnd len="sm" w="sm" type="none"/>
-                    </a:lnT>
-                    <a:lnB cap="flat" cmpd="sng" w="7625">
-                      <a:solidFill>
-                        <a:srgbClr val="000000"/>
-                      </a:solidFill>
-                      <a:prstDash val="solid"/>
-                      <a:round/>
-                      <a:headEnd len="sm" w="sm" type="none"/>
-                      <a:tailEnd len="sm" w="sm" type="none"/>
-                    </a:lnB>
-                  </a:tcPr>
-                </a:tc>
-                <a:tc>
-                  <a:txBody>
-                    <a:bodyPr/>
-                    <a:lstStyle/>
-                    <a:p>
-                      <a:pPr indent="0" lvl="0" marL="0" rtl="0" algn="r">
-                        <a:lnSpc>
-                          <a:spcPct val="115000"/>
-                        </a:lnSpc>
-                        <a:spcBef>
-                          <a:spcPts val="0"/>
-                        </a:spcBef>
-                        <a:spcAft>
-                          <a:spcPts val="0"/>
-                        </a:spcAft>
-                        <a:buNone/>
-                      </a:pPr>
-                      <a:r>
-                        <a:rPr lang="en" sz="1000"/>
-                        <a:t>53.7</a:t>
-                      </a:r>
-                      <a:endParaRPr sz="1000"/>
-                    </a:p>
-                  </a:txBody>
-                  <a:tcPr marT="19050" marB="19050" marR="28575" marL="28575" anchor="b">
-                    <a:lnL cap="flat" cmpd="sng" w="7625">
-                      <a:solidFill>
-                        <a:srgbClr val="000000"/>
-                      </a:solidFill>
-                      <a:prstDash val="solid"/>
-                      <a:round/>
-                      <a:headEnd len="sm" w="sm" type="none"/>
-                      <a:tailEnd len="sm" w="sm" type="none"/>
-                    </a:lnL>
-                    <a:lnR cap="flat" cmpd="sng" w="7625">
-                      <a:solidFill>
-                        <a:srgbClr val="000000"/>
-                      </a:solidFill>
-                      <a:prstDash val="solid"/>
-                      <a:round/>
-                      <a:headEnd len="sm" w="sm" type="none"/>
-                      <a:tailEnd len="sm" w="sm" type="none"/>
-                    </a:lnR>
-                    <a:lnT cap="flat" cmpd="sng" w="7625">
-                      <a:solidFill>
-                        <a:srgbClr val="000000"/>
-                      </a:solidFill>
-                      <a:prstDash val="solid"/>
-                      <a:round/>
-                      <a:headEnd len="sm" w="sm" type="none"/>
-                      <a:tailEnd len="sm" w="sm" type="none"/>
-                    </a:lnT>
-                    <a:lnB cap="flat" cmpd="sng" w="7625">
-                      <a:solidFill>
-                        <a:srgbClr val="000000"/>
-                      </a:solidFill>
-                      <a:prstDash val="solid"/>
-                      <a:round/>
-                      <a:headEnd len="sm" w="sm" type="none"/>
-                      <a:tailEnd len="sm" w="sm" type="none"/>
-                    </a:lnB>
-                  </a:tcPr>
-                </a:tc>
-                <a:tc>
-                  <a:txBody>
-                    <a:bodyPr/>
-                    <a:lstStyle/>
-                    <a:p>
-                      <a:pPr indent="0" lvl="0" marL="0" rtl="0" algn="r">
-                        <a:lnSpc>
-                          <a:spcPct val="115000"/>
-                        </a:lnSpc>
-                        <a:spcBef>
-                          <a:spcPts val="0"/>
-                        </a:spcBef>
-                        <a:spcAft>
-                          <a:spcPts val="0"/>
-                        </a:spcAft>
-                        <a:buNone/>
-                      </a:pPr>
-                      <a:r>
-                        <a:rPr lang="en" sz="1000"/>
-                        <a:t>304.0</a:t>
-                      </a:r>
-                      <a:endParaRPr sz="1000"/>
-                    </a:p>
-                  </a:txBody>
-                  <a:tcPr marT="19050" marB="19050" marR="28575" marL="28575" anchor="b">
-                    <a:lnL cap="flat" cmpd="sng" w="7625">
-                      <a:solidFill>
-                        <a:srgbClr val="000000"/>
-                      </a:solidFill>
-                      <a:prstDash val="solid"/>
-                      <a:round/>
-                      <a:headEnd len="sm" w="sm" type="none"/>
-                      <a:tailEnd len="sm" w="sm" type="none"/>
-                    </a:lnL>
-                    <a:lnR cap="flat" cmpd="sng" w="7625">
-                      <a:solidFill>
-                        <a:srgbClr val="000000"/>
-                      </a:solidFill>
-                      <a:prstDash val="solid"/>
-                      <a:round/>
-                      <a:headEnd len="sm" w="sm" type="none"/>
-                      <a:tailEnd len="sm" w="sm" type="none"/>
-                    </a:lnR>
-                    <a:lnT cap="flat" cmpd="sng" w="7625">
-                      <a:solidFill>
-                        <a:srgbClr val="000000"/>
-                      </a:solidFill>
-                      <a:prstDash val="solid"/>
-                      <a:round/>
-                      <a:headEnd len="sm" w="sm" type="none"/>
-                      <a:tailEnd len="sm" w="sm" type="none"/>
-                    </a:lnT>
-                    <a:lnB cap="flat" cmpd="sng" w="7625">
-                      <a:solidFill>
-                        <a:srgbClr val="000000"/>
-                      </a:solidFill>
-                      <a:prstDash val="solid"/>
-                      <a:round/>
-                      <a:headEnd len="sm" w="sm" type="none"/>
-                      <a:tailEnd len="sm" w="sm" type="none"/>
-                    </a:lnB>
-                  </a:tcPr>
-                </a:tc>
-              </a:tr>
-              <a:tr h="200025">
-                <a:tc>
-                  <a:txBody>
-                    <a:bodyPr/>
-                    <a:lstStyle/>
-                    <a:p>
-                      <a:pPr indent="0" lvl="0" marL="0" rtl="0" algn="l">
-                        <a:lnSpc>
-                          <a:spcPct val="115000"/>
-                        </a:lnSpc>
-                        <a:spcBef>
-                          <a:spcPts val="0"/>
-                        </a:spcBef>
-                        <a:spcAft>
-                          <a:spcPts val="0"/>
-                        </a:spcAft>
-                        <a:buNone/>
-                      </a:pPr>
-                      <a:r>
-                        <a:rPr lang="en" sz="1000"/>
-                        <a:t>C3-X</a:t>
-                      </a:r>
-                      <a:endParaRPr sz="1000"/>
-                    </a:p>
-                  </a:txBody>
-                  <a:tcPr marT="19050" marB="19050" marR="28575" marL="28575" anchor="b">
-                    <a:lnL cap="flat" cmpd="sng" w="7625">
-                      <a:solidFill>
-                        <a:srgbClr val="000000"/>
-                      </a:solidFill>
-                      <a:prstDash val="solid"/>
-                      <a:round/>
-                      <a:headEnd len="sm" w="sm" type="none"/>
-                      <a:tailEnd len="sm" w="sm" type="none"/>
-                    </a:lnL>
-                    <a:lnR cap="flat" cmpd="sng" w="7625">
-                      <a:solidFill>
-                        <a:srgbClr val="000000"/>
-                      </a:solidFill>
-                      <a:prstDash val="solid"/>
-                      <a:round/>
-                      <a:headEnd len="sm" w="sm" type="none"/>
-                      <a:tailEnd len="sm" w="sm" type="none"/>
-                    </a:lnR>
-                    <a:lnT cap="flat" cmpd="sng" w="7625">
-                      <a:solidFill>
-                        <a:srgbClr val="000000"/>
-                      </a:solidFill>
-                      <a:prstDash val="solid"/>
-                      <a:round/>
-                      <a:headEnd len="sm" w="sm" type="none"/>
-                      <a:tailEnd len="sm" w="sm" type="none"/>
-                    </a:lnT>
-                    <a:lnB cap="flat" cmpd="sng" w="7625">
-                      <a:solidFill>
-                        <a:srgbClr val="000000"/>
-                      </a:solidFill>
-                      <a:prstDash val="solid"/>
-                      <a:round/>
-                      <a:headEnd len="sm" w="sm" type="none"/>
-                      <a:tailEnd len="sm" w="sm" type="none"/>
-                    </a:lnB>
-                  </a:tcPr>
-                </a:tc>
-                <a:tc>
-                  <a:txBody>
-                    <a:bodyPr/>
-                    <a:lstStyle/>
-                    <a:p>
-                      <a:pPr indent="0" lvl="0" marL="0" rtl="0" algn="l">
-                        <a:lnSpc>
-                          <a:spcPct val="115000"/>
-                        </a:lnSpc>
-                        <a:spcBef>
-                          <a:spcPts val="0"/>
-                        </a:spcBef>
-                        <a:spcAft>
-                          <a:spcPts val="0"/>
-                        </a:spcAft>
-                        <a:buNone/>
-                      </a:pPr>
-                      <a:r>
-                        <a:rPr lang="en" sz="1000"/>
-                        <a:t>Short Polling</a:t>
-                      </a:r>
-                      <a:endParaRPr sz="1000"/>
-                    </a:p>
-                  </a:txBody>
-                  <a:tcPr marT="19050" marB="19050" marR="28575" marL="28575" anchor="b">
-                    <a:lnL cap="flat" cmpd="sng" w="7625">
-                      <a:solidFill>
-                        <a:srgbClr val="000000"/>
-                      </a:solidFill>
-                      <a:prstDash val="solid"/>
-                      <a:round/>
-                      <a:headEnd len="sm" w="sm" type="none"/>
-                      <a:tailEnd len="sm" w="sm" type="none"/>
-                    </a:lnL>
-                    <a:lnR cap="flat" cmpd="sng" w="7625">
-                      <a:solidFill>
-                        <a:srgbClr val="000000"/>
-                      </a:solidFill>
-                      <a:prstDash val="solid"/>
-                      <a:round/>
-                      <a:headEnd len="sm" w="sm" type="none"/>
-                      <a:tailEnd len="sm" w="sm" type="none"/>
-                    </a:lnR>
-                    <a:lnT cap="flat" cmpd="sng" w="7625">
-                      <a:solidFill>
-                        <a:srgbClr val="000000"/>
-                      </a:solidFill>
-                      <a:prstDash val="solid"/>
-                      <a:round/>
-                      <a:headEnd len="sm" w="sm" type="none"/>
-                      <a:tailEnd len="sm" w="sm" type="none"/>
-                    </a:lnT>
-                    <a:lnB cap="flat" cmpd="sng" w="7625">
-                      <a:solidFill>
-                        <a:srgbClr val="000000"/>
-                      </a:solidFill>
-                      <a:prstDash val="solid"/>
-                      <a:round/>
-                      <a:headEnd len="sm" w="sm" type="none"/>
-                      <a:tailEnd len="sm" w="sm" type="none"/>
-                    </a:lnB>
-                  </a:tcPr>
-                </a:tc>
-                <a:tc>
-                  <a:txBody>
-                    <a:bodyPr/>
-                    <a:lstStyle/>
-                    <a:p>
-                      <a:pPr indent="0" lvl="0" marL="0" rtl="0" algn="r">
-                        <a:lnSpc>
-                          <a:spcPct val="115000"/>
-                        </a:lnSpc>
-                        <a:spcBef>
-                          <a:spcPts val="0"/>
-                        </a:spcBef>
-                        <a:spcAft>
-                          <a:spcPts val="0"/>
-                        </a:spcAft>
-                        <a:buNone/>
-                      </a:pPr>
-                      <a:r>
-                        <a:rPr lang="en" sz="1000"/>
-                        <a:t>12.0</a:t>
-                      </a:r>
-                      <a:endParaRPr sz="1000"/>
-                    </a:p>
-                  </a:txBody>
-                  <a:tcPr marT="19050" marB="19050" marR="28575" marL="28575" anchor="b">
-                    <a:lnL cap="flat" cmpd="sng" w="7625">
-                      <a:solidFill>
-                        <a:srgbClr val="000000"/>
-                      </a:solidFill>
-                      <a:prstDash val="solid"/>
-                      <a:round/>
-                      <a:headEnd len="sm" w="sm" type="none"/>
-                      <a:tailEnd len="sm" w="sm" type="none"/>
-                    </a:lnL>
-                    <a:lnR cap="flat" cmpd="sng" w="7625">
-                      <a:solidFill>
-                        <a:srgbClr val="000000"/>
-                      </a:solidFill>
-                      <a:prstDash val="solid"/>
-                      <a:round/>
-                      <a:headEnd len="sm" w="sm" type="none"/>
-                      <a:tailEnd len="sm" w="sm" type="none"/>
-                    </a:lnR>
-                    <a:lnT cap="flat" cmpd="sng" w="7625">
-                      <a:solidFill>
-                        <a:srgbClr val="000000"/>
-                      </a:solidFill>
-                      <a:prstDash val="solid"/>
-                      <a:round/>
-                      <a:headEnd len="sm" w="sm" type="none"/>
-                      <a:tailEnd len="sm" w="sm" type="none"/>
-                    </a:lnT>
-                    <a:lnB cap="flat" cmpd="sng" w="7625">
-                      <a:solidFill>
-                        <a:srgbClr val="000000"/>
-                      </a:solidFill>
-                      <a:prstDash val="solid"/>
-                      <a:round/>
-                      <a:headEnd len="sm" w="sm" type="none"/>
-                      <a:tailEnd len="sm" w="sm" type="none"/>
-                    </a:lnB>
-                  </a:tcPr>
-                </a:tc>
-                <a:tc>
-                  <a:txBody>
-                    <a:bodyPr/>
-                    <a:lstStyle/>
-                    <a:p>
-                      <a:pPr indent="0" lvl="0" marL="0" rtl="0" algn="r">
-                        <a:lnSpc>
-                          <a:spcPct val="115000"/>
-                        </a:lnSpc>
-                        <a:spcBef>
-                          <a:spcPts val="0"/>
-                        </a:spcBef>
-                        <a:spcAft>
-                          <a:spcPts val="0"/>
-                        </a:spcAft>
-                        <a:buNone/>
-                      </a:pPr>
-                      <a:r>
-                        <a:rPr lang="en" sz="1000"/>
-                        <a:t>12.0</a:t>
-                      </a:r>
-                      <a:endParaRPr sz="1000"/>
-                    </a:p>
-                  </a:txBody>
-                  <a:tcPr marT="19050" marB="19050" marR="28575" marL="28575" anchor="b">
-                    <a:lnL cap="flat" cmpd="sng" w="7625">
-                      <a:solidFill>
-                        <a:srgbClr val="000000"/>
-                      </a:solidFill>
-                      <a:prstDash val="solid"/>
-                      <a:round/>
-                      <a:headEnd len="sm" w="sm" type="none"/>
-                      <a:tailEnd len="sm" w="sm" type="none"/>
-                    </a:lnL>
-                    <a:lnR cap="flat" cmpd="sng" w="7625">
-                      <a:solidFill>
-                        <a:srgbClr val="000000"/>
-                      </a:solidFill>
-                      <a:prstDash val="solid"/>
-                      <a:round/>
-                      <a:headEnd len="sm" w="sm" type="none"/>
-                      <a:tailEnd len="sm" w="sm" type="none"/>
-                    </a:lnR>
-                    <a:lnT cap="flat" cmpd="sng" w="7625">
-                      <a:solidFill>
-                        <a:srgbClr val="000000"/>
-                      </a:solidFill>
-                      <a:prstDash val="solid"/>
-                      <a:round/>
-                      <a:headEnd len="sm" w="sm" type="none"/>
-                      <a:tailEnd len="sm" w="sm" type="none"/>
-                    </a:lnT>
-                    <a:lnB cap="flat" cmpd="sng" w="7625">
-                      <a:solidFill>
-                        <a:srgbClr val="000000"/>
-                      </a:solidFill>
-                      <a:prstDash val="solid"/>
-                      <a:round/>
-                      <a:headEnd len="sm" w="sm" type="none"/>
-                      <a:tailEnd len="sm" w="sm" type="none"/>
-                    </a:lnB>
-                  </a:tcPr>
-                </a:tc>
-                <a:tc>
-                  <a:txBody>
-                    <a:bodyPr/>
-                    <a:lstStyle/>
-                    <a:p>
-                      <a:pPr indent="0" lvl="0" marL="0" rtl="0" algn="r">
-                        <a:lnSpc>
-                          <a:spcPct val="115000"/>
-                        </a:lnSpc>
-                        <a:spcBef>
-                          <a:spcPts val="0"/>
-                        </a:spcBef>
-                        <a:spcAft>
-                          <a:spcPts val="0"/>
-                        </a:spcAft>
-                        <a:buNone/>
-                      </a:pPr>
-                      <a:r>
-                        <a:rPr lang="en" sz="1000"/>
-                        <a:t>12.0</a:t>
-                      </a:r>
-                      <a:endParaRPr sz="1000"/>
-                    </a:p>
-                  </a:txBody>
-                  <a:tcPr marT="19050" marB="19050" marR="28575" marL="28575" anchor="b">
-                    <a:lnL cap="flat" cmpd="sng" w="7625">
-                      <a:solidFill>
-                        <a:srgbClr val="000000"/>
-                      </a:solidFill>
-                      <a:prstDash val="solid"/>
-                      <a:round/>
-                      <a:headEnd len="sm" w="sm" type="none"/>
-                      <a:tailEnd len="sm" w="sm" type="none"/>
-                    </a:lnL>
-                    <a:lnR cap="flat" cmpd="sng" w="7625">
-                      <a:solidFill>
-                        <a:srgbClr val="000000"/>
-                      </a:solidFill>
-                      <a:prstDash val="solid"/>
-                      <a:round/>
-                      <a:headEnd len="sm" w="sm" type="none"/>
-                      <a:tailEnd len="sm" w="sm" type="none"/>
-                    </a:lnR>
-                    <a:lnT cap="flat" cmpd="sng" w="7625">
-                      <a:solidFill>
-                        <a:srgbClr val="000000"/>
-                      </a:solidFill>
-                      <a:prstDash val="solid"/>
-                      <a:round/>
-                      <a:headEnd len="sm" w="sm" type="none"/>
-                      <a:tailEnd len="sm" w="sm" type="none"/>
-                    </a:lnT>
-                    <a:lnB cap="flat" cmpd="sng" w="7625">
-                      <a:solidFill>
-                        <a:srgbClr val="000000"/>
-                      </a:solidFill>
-                      <a:prstDash val="solid"/>
-                      <a:round/>
-                      <a:headEnd len="sm" w="sm" type="none"/>
-                      <a:tailEnd len="sm" w="sm" type="none"/>
-                    </a:lnB>
-                  </a:tcPr>
-                </a:tc>
-                <a:tc>
-                  <a:txBody>
-                    <a:bodyPr/>
-                    <a:lstStyle/>
-                    <a:p>
-                      <a:pPr indent="0" lvl="0" marL="0" rtl="0" algn="r">
-                        <a:lnSpc>
-                          <a:spcPct val="115000"/>
-                        </a:lnSpc>
-                        <a:spcBef>
-                          <a:spcPts val="0"/>
-                        </a:spcBef>
-                        <a:spcAft>
-                          <a:spcPts val="0"/>
-                        </a:spcAft>
-                        <a:buNone/>
-                      </a:pPr>
-                      <a:r>
-                        <a:rPr lang="en" sz="1000"/>
-                        <a:t>1120.7</a:t>
-                      </a:r>
-                      <a:endParaRPr sz="1000"/>
-                    </a:p>
-                  </a:txBody>
-                  <a:tcPr marT="19050" marB="19050" marR="28575" marL="28575" anchor="b">
-                    <a:lnL cap="flat" cmpd="sng" w="7625">
-                      <a:solidFill>
-                        <a:srgbClr val="000000"/>
-                      </a:solidFill>
-                      <a:prstDash val="solid"/>
-                      <a:round/>
-                      <a:headEnd len="sm" w="sm" type="none"/>
-                      <a:tailEnd len="sm" w="sm" type="none"/>
-                    </a:lnL>
-                    <a:lnR cap="flat" cmpd="sng" w="7625">
-                      <a:solidFill>
-                        <a:srgbClr val="000000"/>
-                      </a:solidFill>
-                      <a:prstDash val="solid"/>
-                      <a:round/>
-                      <a:headEnd len="sm" w="sm" type="none"/>
-                      <a:tailEnd len="sm" w="sm" type="none"/>
-                    </a:lnR>
-                    <a:lnT cap="flat" cmpd="sng" w="7625">
-                      <a:solidFill>
-                        <a:srgbClr val="000000"/>
-                      </a:solidFill>
-                      <a:prstDash val="solid"/>
-                      <a:round/>
-                      <a:headEnd len="sm" w="sm" type="none"/>
-                      <a:tailEnd len="sm" w="sm" type="none"/>
-                    </a:lnT>
-                    <a:lnB cap="flat" cmpd="sng" w="7625">
-                      <a:solidFill>
-                        <a:srgbClr val="000000"/>
-                      </a:solidFill>
-                      <a:prstDash val="solid"/>
-                      <a:round/>
-                      <a:headEnd len="sm" w="sm" type="none"/>
-                      <a:tailEnd len="sm" w="sm" type="none"/>
-                    </a:lnB>
-                  </a:tcPr>
-                </a:tc>
-              </a:tr>
-              <a:tr h="200025">
-                <a:tc>
-                  <a:txBody>
-                    <a:bodyPr/>
-                    <a:lstStyle/>
-                    <a:p>
-                      <a:pPr indent="0" lvl="0" marL="0" rtl="0" algn="l">
-                        <a:lnSpc>
-                          <a:spcPct val="115000"/>
-                        </a:lnSpc>
-                        <a:spcBef>
-                          <a:spcPts val="0"/>
-                        </a:spcBef>
-                        <a:spcAft>
-                          <a:spcPts val="0"/>
-                        </a:spcAft>
-                        <a:buNone/>
-                      </a:pPr>
-                      <a:r>
-                        <a:rPr lang="en" sz="1000"/>
-                        <a:t>C3-X</a:t>
-                      </a:r>
-                      <a:endParaRPr sz="1000"/>
-                    </a:p>
-                  </a:txBody>
-                  <a:tcPr marT="19050" marB="19050" marR="28575" marL="28575" anchor="b">
-                    <a:lnL cap="flat" cmpd="sng" w="7625">
-                      <a:solidFill>
-                        <a:srgbClr val="000000"/>
-                      </a:solidFill>
-                      <a:prstDash val="solid"/>
-                      <a:round/>
-                      <a:headEnd len="sm" w="sm" type="none"/>
-                      <a:tailEnd len="sm" w="sm" type="none"/>
-                    </a:lnL>
-                    <a:lnR cap="flat" cmpd="sng" w="7625">
-                      <a:solidFill>
-                        <a:srgbClr val="000000"/>
-                      </a:solidFill>
-                      <a:prstDash val="solid"/>
-                      <a:round/>
-                      <a:headEnd len="sm" w="sm" type="none"/>
-                      <a:tailEnd len="sm" w="sm" type="none"/>
-                    </a:lnR>
-                    <a:lnT cap="flat" cmpd="sng" w="7625">
-                      <a:solidFill>
-                        <a:srgbClr val="000000"/>
-                      </a:solidFill>
-                      <a:prstDash val="solid"/>
-                      <a:round/>
-                      <a:headEnd len="sm" w="sm" type="none"/>
-                      <a:tailEnd len="sm" w="sm" type="none"/>
-                    </a:lnT>
-                    <a:lnB cap="flat" cmpd="sng" w="7625">
-                      <a:solidFill>
-                        <a:srgbClr val="000000"/>
-                      </a:solidFill>
-                      <a:prstDash val="solid"/>
-                      <a:round/>
-                      <a:headEnd len="sm" w="sm" type="none"/>
-                      <a:tailEnd len="sm" w="sm" type="none"/>
-                    </a:lnB>
-                  </a:tcPr>
-                </a:tc>
-                <a:tc>
-                  <a:txBody>
-                    <a:bodyPr/>
-                    <a:lstStyle/>
-                    <a:p>
-                      <a:pPr indent="0" lvl="0" marL="0" rtl="0" algn="l">
-                        <a:lnSpc>
-                          <a:spcPct val="115000"/>
-                        </a:lnSpc>
-                        <a:spcBef>
-                          <a:spcPts val="0"/>
-                        </a:spcBef>
-                        <a:spcAft>
-                          <a:spcPts val="0"/>
-                        </a:spcAft>
-                        <a:buNone/>
-                      </a:pPr>
-                      <a:r>
-                        <a:rPr lang="en" sz="1000"/>
-                        <a:t>Long Polling</a:t>
-                      </a:r>
-                      <a:endParaRPr sz="1000"/>
-                    </a:p>
-                  </a:txBody>
-                  <a:tcPr marT="19050" marB="19050" marR="28575" marL="28575" anchor="b">
-                    <a:lnL cap="flat" cmpd="sng" w="7625">
-                      <a:solidFill>
-                        <a:srgbClr val="000000"/>
-                      </a:solidFill>
-                      <a:prstDash val="solid"/>
-                      <a:round/>
-                      <a:headEnd len="sm" w="sm" type="none"/>
-                      <a:tailEnd len="sm" w="sm" type="none"/>
-                    </a:lnL>
-                    <a:lnR cap="flat" cmpd="sng" w="7625">
-                      <a:solidFill>
-                        <a:srgbClr val="000000"/>
-                      </a:solidFill>
-                      <a:prstDash val="solid"/>
-                      <a:round/>
-                      <a:headEnd len="sm" w="sm" type="none"/>
-                      <a:tailEnd len="sm" w="sm" type="none"/>
-                    </a:lnR>
-                    <a:lnT cap="flat" cmpd="sng" w="7625">
-                      <a:solidFill>
-                        <a:srgbClr val="000000"/>
-                      </a:solidFill>
-                      <a:prstDash val="solid"/>
-                      <a:round/>
-                      <a:headEnd len="sm" w="sm" type="none"/>
-                      <a:tailEnd len="sm" w="sm" type="none"/>
-                    </a:lnT>
-                    <a:lnB cap="flat" cmpd="sng" w="7625">
-                      <a:solidFill>
-                        <a:srgbClr val="000000"/>
-                      </a:solidFill>
-                      <a:prstDash val="solid"/>
-                      <a:round/>
-                      <a:headEnd len="sm" w="sm" type="none"/>
-                      <a:tailEnd len="sm" w="sm" type="none"/>
-                    </a:lnB>
-                  </a:tcPr>
-                </a:tc>
-                <a:tc>
-                  <a:txBody>
-                    <a:bodyPr/>
-                    <a:lstStyle/>
-                    <a:p>
-                      <a:pPr indent="0" lvl="0" marL="0" rtl="0" algn="r">
-                        <a:lnSpc>
-                          <a:spcPct val="115000"/>
-                        </a:lnSpc>
-                        <a:spcBef>
-                          <a:spcPts val="0"/>
-                        </a:spcBef>
-                        <a:spcAft>
-                          <a:spcPts val="0"/>
-                        </a:spcAft>
-                        <a:buNone/>
-                      </a:pPr>
-                      <a:r>
-                        <a:rPr lang="en" sz="1000"/>
-                        <a:t>27.0</a:t>
-                      </a:r>
-                      <a:endParaRPr sz="1000"/>
-                    </a:p>
-                  </a:txBody>
-                  <a:tcPr marT="19050" marB="19050" marR="28575" marL="28575" anchor="b">
-                    <a:lnL cap="flat" cmpd="sng" w="7625">
-                      <a:solidFill>
-                        <a:srgbClr val="000000"/>
-                      </a:solidFill>
-                      <a:prstDash val="solid"/>
-                      <a:round/>
-                      <a:headEnd len="sm" w="sm" type="none"/>
-                      <a:tailEnd len="sm" w="sm" type="none"/>
-                    </a:lnL>
-                    <a:lnR cap="flat" cmpd="sng" w="7625">
-                      <a:solidFill>
-                        <a:srgbClr val="000000"/>
-                      </a:solidFill>
-                      <a:prstDash val="solid"/>
-                      <a:round/>
-                      <a:headEnd len="sm" w="sm" type="none"/>
-                      <a:tailEnd len="sm" w="sm" type="none"/>
-                    </a:lnR>
-                    <a:lnT cap="flat" cmpd="sng" w="7625">
-                      <a:solidFill>
-                        <a:srgbClr val="000000"/>
-                      </a:solidFill>
-                      <a:prstDash val="solid"/>
-                      <a:round/>
-                      <a:headEnd len="sm" w="sm" type="none"/>
-                      <a:tailEnd len="sm" w="sm" type="none"/>
-                    </a:lnT>
-                    <a:lnB cap="flat" cmpd="sng" w="7625">
-                      <a:solidFill>
-                        <a:srgbClr val="000000"/>
-                      </a:solidFill>
-                      <a:prstDash val="solid"/>
-                      <a:round/>
-                      <a:headEnd len="sm" w="sm" type="none"/>
-                      <a:tailEnd len="sm" w="sm" type="none"/>
-                    </a:lnB>
-                  </a:tcPr>
-                </a:tc>
-                <a:tc>
-                  <a:txBody>
-                    <a:bodyPr/>
-                    <a:lstStyle/>
-                    <a:p>
-                      <a:pPr indent="0" lvl="0" marL="0" rtl="0" algn="r">
-                        <a:lnSpc>
-                          <a:spcPct val="115000"/>
-                        </a:lnSpc>
-                        <a:spcBef>
-                          <a:spcPts val="0"/>
-                        </a:spcBef>
-                        <a:spcAft>
-                          <a:spcPts val="0"/>
-                        </a:spcAft>
-                        <a:buNone/>
-                      </a:pPr>
-                      <a:r>
-                        <a:rPr lang="en" sz="1000"/>
-                        <a:t>27.0</a:t>
-                      </a:r>
-                      <a:endParaRPr sz="1000"/>
-                    </a:p>
-                  </a:txBody>
-                  <a:tcPr marT="19050" marB="19050" marR="28575" marL="28575" anchor="b">
-                    <a:lnL cap="flat" cmpd="sng" w="7625">
-                      <a:solidFill>
-                        <a:srgbClr val="000000"/>
-                      </a:solidFill>
-                      <a:prstDash val="solid"/>
-                      <a:round/>
-                      <a:headEnd len="sm" w="sm" type="none"/>
-                      <a:tailEnd len="sm" w="sm" type="none"/>
-                    </a:lnL>
-                    <a:lnR cap="flat" cmpd="sng" w="7625">
-                      <a:solidFill>
-                        <a:srgbClr val="000000"/>
-                      </a:solidFill>
-                      <a:prstDash val="solid"/>
-                      <a:round/>
-                      <a:headEnd len="sm" w="sm" type="none"/>
-                      <a:tailEnd len="sm" w="sm" type="none"/>
-                    </a:lnR>
-                    <a:lnT cap="flat" cmpd="sng" w="7625">
-                      <a:solidFill>
-                        <a:srgbClr val="000000"/>
-                      </a:solidFill>
-                      <a:prstDash val="solid"/>
-                      <a:round/>
-                      <a:headEnd len="sm" w="sm" type="none"/>
-                      <a:tailEnd len="sm" w="sm" type="none"/>
-                    </a:lnT>
-                    <a:lnB cap="flat" cmpd="sng" w="7625">
-                      <a:solidFill>
-                        <a:srgbClr val="000000"/>
-                      </a:solidFill>
-                      <a:prstDash val="solid"/>
-                      <a:round/>
-                      <a:headEnd len="sm" w="sm" type="none"/>
-                      <a:tailEnd len="sm" w="sm" type="none"/>
-                    </a:lnB>
-                  </a:tcPr>
-                </a:tc>
-                <a:tc>
-                  <a:txBody>
-                    <a:bodyPr/>
-                    <a:lstStyle/>
-                    <a:p>
-                      <a:pPr indent="0" lvl="0" marL="0" rtl="0" algn="r">
-                        <a:lnSpc>
-                          <a:spcPct val="115000"/>
-                        </a:lnSpc>
-                        <a:spcBef>
-                          <a:spcPts val="0"/>
-                        </a:spcBef>
-                        <a:spcAft>
-                          <a:spcPts val="0"/>
-                        </a:spcAft>
-                        <a:buNone/>
-                      </a:pPr>
-                      <a:r>
-                        <a:rPr lang="en" sz="1000"/>
-                        <a:t>27.0</a:t>
-                      </a:r>
-                      <a:endParaRPr sz="1000"/>
-                    </a:p>
-                  </a:txBody>
-                  <a:tcPr marT="19050" marB="19050" marR="28575" marL="28575" anchor="b">
-                    <a:lnL cap="flat" cmpd="sng" w="7625">
-                      <a:solidFill>
-                        <a:srgbClr val="000000"/>
-                      </a:solidFill>
-                      <a:prstDash val="solid"/>
-                      <a:round/>
-                      <a:headEnd len="sm" w="sm" type="none"/>
-                      <a:tailEnd len="sm" w="sm" type="none"/>
-                    </a:lnL>
-                    <a:lnR cap="flat" cmpd="sng" w="7625">
-                      <a:solidFill>
-                        <a:srgbClr val="000000"/>
-                      </a:solidFill>
-                      <a:prstDash val="solid"/>
-                      <a:round/>
-                      <a:headEnd len="sm" w="sm" type="none"/>
-                      <a:tailEnd len="sm" w="sm" type="none"/>
-                    </a:lnR>
-                    <a:lnT cap="flat" cmpd="sng" w="7625">
-                      <a:solidFill>
-                        <a:srgbClr val="000000"/>
-                      </a:solidFill>
-                      <a:prstDash val="solid"/>
-                      <a:round/>
-                      <a:headEnd len="sm" w="sm" type="none"/>
-                      <a:tailEnd len="sm" w="sm" type="none"/>
-                    </a:lnT>
-                    <a:lnB cap="flat" cmpd="sng" w="7625">
-                      <a:solidFill>
-                        <a:srgbClr val="000000"/>
-                      </a:solidFill>
-                      <a:prstDash val="solid"/>
-                      <a:round/>
-                      <a:headEnd len="sm" w="sm" type="none"/>
-                      <a:tailEnd len="sm" w="sm" type="none"/>
-                    </a:lnB>
-                  </a:tcPr>
-                </a:tc>
-                <a:tc>
-                  <a:txBody>
-                    <a:bodyPr/>
-                    <a:lstStyle/>
-                    <a:p>
-                      <a:pPr indent="0" lvl="0" marL="0" rtl="0" algn="r">
-                        <a:lnSpc>
-                          <a:spcPct val="115000"/>
-                        </a:lnSpc>
-                        <a:spcBef>
-                          <a:spcPts val="0"/>
-                        </a:spcBef>
-                        <a:spcAft>
-                          <a:spcPts val="0"/>
-                        </a:spcAft>
-                        <a:buNone/>
-                      </a:pPr>
-                      <a:r>
-                        <a:rPr lang="en" sz="1000"/>
-                        <a:t>563.0</a:t>
-                      </a:r>
-                      <a:endParaRPr sz="1000"/>
-                    </a:p>
-                  </a:txBody>
-                  <a:tcPr marT="19050" marB="19050" marR="28575" marL="28575" anchor="b">
-                    <a:lnL cap="flat" cmpd="sng" w="7625">
-                      <a:solidFill>
-                        <a:srgbClr val="000000"/>
-                      </a:solidFill>
-                      <a:prstDash val="solid"/>
-                      <a:round/>
-                      <a:headEnd len="sm" w="sm" type="none"/>
-                      <a:tailEnd len="sm" w="sm" type="none"/>
-                    </a:lnL>
-                    <a:lnR cap="flat" cmpd="sng" w="7625">
-                      <a:solidFill>
-                        <a:srgbClr val="000000"/>
-                      </a:solidFill>
-                      <a:prstDash val="solid"/>
-                      <a:round/>
-                      <a:headEnd len="sm" w="sm" type="none"/>
-                      <a:tailEnd len="sm" w="sm" type="none"/>
-                    </a:lnR>
-                    <a:lnT cap="flat" cmpd="sng" w="7625">
-                      <a:solidFill>
-                        <a:srgbClr val="000000"/>
-                      </a:solidFill>
-                      <a:prstDash val="solid"/>
-                      <a:round/>
-                      <a:headEnd len="sm" w="sm" type="none"/>
-                      <a:tailEnd len="sm" w="sm" type="none"/>
-                    </a:lnT>
-                    <a:lnB cap="flat" cmpd="sng" w="7625">
-                      <a:solidFill>
-                        <a:srgbClr val="000000"/>
-                      </a:solidFill>
-                      <a:prstDash val="solid"/>
-                      <a:round/>
-                      <a:headEnd len="sm" w="sm" type="none"/>
-                      <a:tailEnd len="sm" w="sm" type="none"/>
-                    </a:lnB>
-                  </a:tcPr>
-                </a:tc>
-              </a:tr>
-            </a:tbl>
-          </a:graphicData>
-        </a:graphic>
-      </p:graphicFrame>
+        </p:nvPicPr>
+        <p:blipFill>
+          <a:blip r:embed="rId3">
+            <a:alphaModFix/>
+          </a:blip>
+          <a:stretch>
+            <a:fillRect/>
+          </a:stretch>
+        </p:blipFill>
+        <p:spPr>
+          <a:xfrm>
+            <a:off x="816870" y="1525075"/>
+            <a:ext cx="7523308" cy="2805026"/>
+          </a:xfrm>
+          <a:prstGeom prst="rect">
+            <a:avLst/>
+          </a:prstGeom>
+          <a:noFill/>
+          <a:ln cap="flat" cmpd="sng" w="9525">
+            <a:solidFill>
+              <a:schemeClr val="dk2"/>
+            </a:solidFill>
+            <a:prstDash val="solid"/>
+            <a:round/>
+            <a:headEnd len="sm" w="sm" type="none"/>
+            <a:tailEnd len="sm" w="sm" type="none"/>
+          </a:ln>
+        </p:spPr>
+      </p:pic>
     </p:spTree>
   </p:cSld>
   <p:clrMapOvr>
@@ -51687,9 +46734,9 @@
 </file>
 
 <file path=ppt/theme/theme1.xml><?xml version="1.0" encoding="utf-8"?>
-<a:theme xmlns:a="http://schemas.openxmlformats.org/drawingml/2006/main" xmlns:r="http://schemas.openxmlformats.org/officeDocument/2006/relationships">
+<a:theme xmlns:a="http://schemas.openxmlformats.org/drawingml/2006/main" xmlns:r="http://schemas.openxmlformats.org/officeDocument/2006/relationships" name="Simple Light">
   <a:themeElements>
-    <a:clrScheme name="Default">
+    <a:clrScheme name="Simple Light">
       <a:dk1>
         <a:srgbClr val="000000"/>
       </a:dk1>
@@ -51697,34 +46744,34 @@
         <a:srgbClr val="FFFFFF"/>
       </a:lt1>
       <a:dk2>
-        <a:srgbClr val="158158"/>
+        <a:srgbClr val="595959"/>
       </a:dk2>
       <a:lt2>
-        <a:srgbClr val="F3F3F3"/>
+        <a:srgbClr val="EEEEEE"/>
       </a:lt2>
       <a:accent1>
-        <a:srgbClr val="058DC7"/>
+        <a:srgbClr val="4285F4"/>
       </a:accent1>
       <a:accent2>
-        <a:srgbClr val="50B432"/>
+        <a:srgbClr val="212121"/>
       </a:accent2>
       <a:accent3>
-        <a:srgbClr val="ED561B"/>
+        <a:srgbClr val="78909C"/>
       </a:accent3>
       <a:accent4>
-        <a:srgbClr val="EDEF00"/>
+        <a:srgbClr val="FFAB40"/>
       </a:accent4>
       <a:accent5>
-        <a:srgbClr val="24CBE5"/>
+        <a:srgbClr val="0097A7"/>
       </a:accent5>
       <a:accent6>
-        <a:srgbClr val="64E572"/>
+        <a:srgbClr val="EEFF41"/>
       </a:accent6>
       <a:hlink>
-        <a:srgbClr val="2200CC"/>
+        <a:srgbClr val="0097A7"/>
       </a:hlink>
       <a:folHlink>
-        <a:srgbClr val="551A8B"/>
+        <a:srgbClr val="0097A7"/>
       </a:folHlink>
     </a:clrScheme>
     <a:fontScheme name="Office">
@@ -51966,9 +47013,9 @@
 </file>
 
 <file path=ppt/theme/theme2.xml><?xml version="1.0" encoding="utf-8"?>
-<a:theme xmlns:a="http://schemas.openxmlformats.org/drawingml/2006/main" xmlns:r="http://schemas.openxmlformats.org/officeDocument/2006/relationships" name="Simple Light">
+<a:theme xmlns:a="http://schemas.openxmlformats.org/drawingml/2006/main" xmlns:r="http://schemas.openxmlformats.org/officeDocument/2006/relationships">
   <a:themeElements>
-    <a:clrScheme name="Simple Light">
+    <a:clrScheme name="Default">
       <a:dk1>
         <a:srgbClr val="000000"/>
       </a:dk1>
@@ -51976,34 +47023,34 @@
         <a:srgbClr val="FFFFFF"/>
       </a:lt1>
       <a:dk2>
-        <a:srgbClr val="595959"/>
+        <a:srgbClr val="158158"/>
       </a:dk2>
       <a:lt2>
-        <a:srgbClr val="EEEEEE"/>
+        <a:srgbClr val="F3F3F3"/>
       </a:lt2>
       <a:accent1>
-        <a:srgbClr val="4285F4"/>
+        <a:srgbClr val="058DC7"/>
       </a:accent1>
       <a:accent2>
-        <a:srgbClr val="212121"/>
+        <a:srgbClr val="50B432"/>
       </a:accent2>
       <a:accent3>
-        <a:srgbClr val="78909C"/>
+        <a:srgbClr val="ED561B"/>
       </a:accent3>
       <a:accent4>
-        <a:srgbClr val="FFAB40"/>
+        <a:srgbClr val="EDEF00"/>
       </a:accent4>
       <a:accent5>
-        <a:srgbClr val="0097A7"/>
+        <a:srgbClr val="24CBE5"/>
       </a:accent5>
       <a:accent6>
-        <a:srgbClr val="EEFF41"/>
+        <a:srgbClr val="64E572"/>
       </a:accent6>
       <a:hlink>
-        <a:srgbClr val="0097A7"/>
+        <a:srgbClr val="2200CC"/>
       </a:hlink>
       <a:folHlink>
-        <a:srgbClr val="0097A7"/>
+        <a:srgbClr val="551A8B"/>
       </a:folHlink>
     </a:clrScheme>
     <a:fontScheme name="Office">
